--- a/mkt1107/output/MKT1107_W10_slides.pptx
+++ b/mkt1107/output/MKT1107_W10_slides.pptx
@@ -152,19 +152,19 @@
   <p:extLst>
     <p:ext uri="{521415D9-36F7-43E2-AB2F-B90AF26B5E84}">
       <p14:sectionLst xmlns:p14="http://schemas.microsoft.com/office/powerpoint/2010/main">
-        <p14:section name="Mở đầu" id="{0699faae-581b-aa53-76e3-05896ba552fa}">
+        <p14:section name="Mở đầu" id="{4705636b-4751-7c04-5ef6-4ea4ea91d37d}">
           <p14:sldIdLst>
             <p14:sldId id="256"/>
           </p14:sldIdLst>
         </p14:section>
-        <p14:section name="S1 · Khởi động: kiểm tra bài tập Buổi 9" id="{eb16b82e-b93c-3b50-6b75-3663526a06c0}">
+        <p14:section name="S1 · Khởi động: kiểm tra bài tập Buổi 9" id="{ec8b2770-54d8-f19d-4302-221d5a846422}">
           <p14:sldIdLst>
             <p14:sldId id="257"/>
             <p14:sldId id="258"/>
             <p14:sldId id="259"/>
           </p14:sldIdLst>
         </p14:section>
-        <p14:section name="S2 · Bảng câu hỏi là gì, cần gì, đi qua mấy bước" id="{bf67cb87-fdd2-23a4-923b-18cdac690527}">
+        <p14:section name="S2 · Bảng câu hỏi là gì, cần gì, đi qua mấy bước" id="{41a5c7df-d22b-317f-c33f-490b2473c7a7}">
           <p14:sldIdLst>
             <p14:sldId id="260"/>
             <p14:sldId id="261"/>
@@ -174,7 +174,7 @@
             <p14:sldId id="265"/>
           </p14:sldIdLst>
         </p14:section>
-        <p14:section name="S3 · Từ mục tiêu đến câu hỏi: bước 1–4" id="{ea330209-4cf7-0c39-066c-eb99d780e68a}">
+        <p14:section name="S3 · Từ mục tiêu đến câu hỏi: bước 1–4" id="{1f3c1320-e364-89dd-4664-b1fcd42bc6a0}">
           <p14:sldIdLst>
             <p14:sldId id="266"/>
             <p14:sldId id="267"/>
@@ -189,14 +189,14 @@
             <p14:sldId id="276"/>
           </p14:sldIdLst>
         </p14:section>
-        <p14:section name="S4 · Kiểm tra nhanh" id="{fb84a5da-00e8-0be8-6732-7cdbbbdf7d38}">
+        <p14:section name="S4 · Kiểm tra nhanh" id="{e50095d3-2fd3-4dad-f26c-54d3429a4e70}">
           <p14:sldIdLst>
             <p14:sldId id="277"/>
             <p14:sldId id="278"/>
             <p14:sldId id="279"/>
           </p14:sldIdLst>
         </p14:section>
-        <p14:section name="S5 · Cấu trúc 3 phần và hình thức trực tuyến" id="{5439251a-bd2c-7c07-1637-b7fdd59bbdb7}">
+        <p14:section name="S5 · Cấu trúc 3 phần và hình thức trực tuyến" id="{c2fb0ff6-bad3-e82f-b24e-6b7e3ffeede1}">
           <p14:sldIdLst>
             <p14:sldId id="280"/>
             <p14:sldId id="281"/>
@@ -207,7 +207,7 @@
             <p14:sldId id="286"/>
           </p14:sldIdLst>
         </p14:section>
-        <p14:section name="S6 · Năm lỗi đặt câu hỏi: bắt lỗi nhanh" id="{fe0c2054-88e4-5381-4988-85b9a42df474}">
+        <p14:section name="S6 · Năm lỗi đặt câu hỏi: bắt lỗi nhanh" id="{f502f390-9c78-27c0-8943-b5d66710d581}">
           <p14:sldIdLst>
             <p14:sldId id="287"/>
             <p14:sldId id="288"/>
@@ -220,14 +220,14 @@
             <p14:sldId id="295"/>
           </p14:sldIdLst>
         </p14:section>
-        <p14:section name="S8 · Thực hành nhóm: Xưởng bảng hỏi" id="{136deb10-2b17-37f3-95b6-42bdf1791d6c}">
+        <p14:section name="S8 · Thực hành nhóm: Xưởng bảng hỏi" id="{519cef18-13e7-18cb-a8a1-920a4e5fb358}">
           <p14:sldIdLst>
             <p14:sldId id="296"/>
             <p14:sldId id="297"/>
             <p14:sldId id="298"/>
           </p14:sldIdLst>
         </p14:section>
-        <p14:section name="S9 · Kết buổi" id="{dbc473f4-6d67-ed80-fb9c-9d7b254cb220}">
+        <p14:section name="S9 · Kết buổi" id="{f660c5ee-f0e4-d9ee-f6b7-7f6082c226de}">
           <p14:sldIdLst>
             <p14:sldId id="299"/>
             <p14:sldId id="300"/>

--- a/mkt1107/output/MKT1107_W10_slides.pptx
+++ b/mkt1107/output/MKT1107_W10_slides.pptx
@@ -152,19 +152,19 @@
   <p:extLst>
     <p:ext uri="{521415D9-36F7-43E2-AB2F-B90AF26B5E84}">
       <p14:sectionLst xmlns:p14="http://schemas.microsoft.com/office/powerpoint/2010/main">
-        <p14:section name="Mở đầu" id="{4705636b-4751-7c04-5ef6-4ea4ea91d37d}">
+        <p14:section name="Mở đầu" id="{b618e5b2-c43b-c301-8792-93c0b3f5e8cd}">
           <p14:sldIdLst>
             <p14:sldId id="256"/>
           </p14:sldIdLst>
         </p14:section>
-        <p14:section name="S1 · Khởi động: kiểm tra bài tập Buổi 9" id="{ec8b2770-54d8-f19d-4302-221d5a846422}">
+        <p14:section name="S1 · Khởi động: kiểm tra bài tập Buổi 9" id="{3dc68a03-34fc-89f5-2dbb-a79d1e075351}">
           <p14:sldIdLst>
             <p14:sldId id="257"/>
             <p14:sldId id="258"/>
             <p14:sldId id="259"/>
           </p14:sldIdLst>
         </p14:section>
-        <p14:section name="S2 · Bảng câu hỏi là gì, cần gì, đi qua mấy bước" id="{41a5c7df-d22b-317f-c33f-490b2473c7a7}">
+        <p14:section name="S2 · Bảng câu hỏi là gì, cần gì, đi qua mấy bước" id="{5900b930-abf5-08d6-8a2f-500745b97f80}">
           <p14:sldIdLst>
             <p14:sldId id="260"/>
             <p14:sldId id="261"/>
@@ -174,7 +174,7 @@
             <p14:sldId id="265"/>
           </p14:sldIdLst>
         </p14:section>
-        <p14:section name="S3 · Từ mục tiêu đến câu hỏi: bước 1–4" id="{1f3c1320-e364-89dd-4664-b1fcd42bc6a0}">
+        <p14:section name="S3 · Từ mục tiêu đến câu hỏi: bước 1–4" id="{8d023ac0-c879-bc91-ed99-a43af57b18d0}">
           <p14:sldIdLst>
             <p14:sldId id="266"/>
             <p14:sldId id="267"/>
@@ -189,14 +189,14 @@
             <p14:sldId id="276"/>
           </p14:sldIdLst>
         </p14:section>
-        <p14:section name="S4 · Kiểm tra nhanh" id="{e50095d3-2fd3-4dad-f26c-54d3429a4e70}">
+        <p14:section name="S4 · Kiểm tra nhanh" id="{7cf45ecc-2443-c422-83d4-a5318deabddd}">
           <p14:sldIdLst>
             <p14:sldId id="277"/>
             <p14:sldId id="278"/>
             <p14:sldId id="279"/>
           </p14:sldIdLst>
         </p14:section>
-        <p14:section name="S5 · Cấu trúc 3 phần và hình thức trực tuyến" id="{c2fb0ff6-bad3-e82f-b24e-6b7e3ffeede1}">
+        <p14:section name="S5 · Cấu trúc 3 phần và hình thức trực tuyến" id="{3573e9a3-0db8-81d7-d4e9-e0a532f5853e}">
           <p14:sldIdLst>
             <p14:sldId id="280"/>
             <p14:sldId id="281"/>
@@ -207,7 +207,7 @@
             <p14:sldId id="286"/>
           </p14:sldIdLst>
         </p14:section>
-        <p14:section name="S6 · Năm lỗi đặt câu hỏi: bắt lỗi nhanh" id="{f502f390-9c78-27c0-8943-b5d66710d581}">
+        <p14:section name="S6 · Năm lỗi đặt câu hỏi: bắt lỗi nhanh" id="{3df8f68a-2224-907e-a550-30e9e1b852af}">
           <p14:sldIdLst>
             <p14:sldId id="287"/>
             <p14:sldId id="288"/>
@@ -220,14 +220,14 @@
             <p14:sldId id="295"/>
           </p14:sldIdLst>
         </p14:section>
-        <p14:section name="S8 · Thực hành nhóm: Xưởng bảng hỏi" id="{519cef18-13e7-18cb-a8a1-920a4e5fb358}">
+        <p14:section name="S8 · Thực hành nhóm: Xưởng bảng hỏi" id="{64afd2df-65d9-24f3-74a2-cef23d28ac36}">
           <p14:sldIdLst>
             <p14:sldId id="296"/>
             <p14:sldId id="297"/>
             <p14:sldId id="298"/>
           </p14:sldIdLst>
         </p14:section>
-        <p14:section name="S9 · Kết buổi" id="{f660c5ee-f0e4-d9ee-f6b7-7f6082c226de}">
+        <p14:section name="S9 · Kết buổi" id="{53b948ef-681f-f739-0beb-281b1ff1d4f0}">
           <p14:sldIdLst>
             <p14:sldId id="299"/>
             <p14:sldId id="300"/>

--- a/mkt1107/output/MKT1107_W10_slides.pptx
+++ b/mkt1107/output/MKT1107_W10_slides.pptx
@@ -152,19 +152,19 @@
   <p:extLst>
     <p:ext uri="{521415D9-36F7-43E2-AB2F-B90AF26B5E84}">
       <p14:sectionLst xmlns:p14="http://schemas.microsoft.com/office/powerpoint/2010/main">
-        <p14:section name="Mở đầu" id="{b618e5b2-c43b-c301-8792-93c0b3f5e8cd}">
+        <p14:section name="Mở đầu" id="{b90d166c-9aba-7747-7d17-205b84e841a4}">
           <p14:sldIdLst>
             <p14:sldId id="256"/>
           </p14:sldIdLst>
         </p14:section>
-        <p14:section name="S1 · Khởi động: kiểm tra bài tập Buổi 9" id="{3dc68a03-34fc-89f5-2dbb-a79d1e075351}">
+        <p14:section name="S1 · Khởi động: kiểm tra bài tập Buổi 9" id="{44183cda-e9ff-3b99-1c24-bf6f4e80bfba}">
           <p14:sldIdLst>
             <p14:sldId id="257"/>
             <p14:sldId id="258"/>
             <p14:sldId id="259"/>
           </p14:sldIdLst>
         </p14:section>
-        <p14:section name="S2 · Bảng câu hỏi là gì, cần gì, đi qua mấy bước" id="{5900b930-abf5-08d6-8a2f-500745b97f80}">
+        <p14:section name="S2 · Bảng câu hỏi là gì, cần gì, đi qua mấy bước" id="{a37adabe-76dd-0ee0-e841-ddf300658b9b}">
           <p14:sldIdLst>
             <p14:sldId id="260"/>
             <p14:sldId id="261"/>
@@ -174,7 +174,7 @@
             <p14:sldId id="265"/>
           </p14:sldIdLst>
         </p14:section>
-        <p14:section name="S3 · Từ mục tiêu đến câu hỏi: bước 1–4" id="{8d023ac0-c879-bc91-ed99-a43af57b18d0}">
+        <p14:section name="S3 · Từ mục tiêu đến câu hỏi: bước 1–4" id="{a0ab9a22-985f-f7ec-900d-b12f9c4f5263}">
           <p14:sldIdLst>
             <p14:sldId id="266"/>
             <p14:sldId id="267"/>
@@ -189,14 +189,14 @@
             <p14:sldId id="276"/>
           </p14:sldIdLst>
         </p14:section>
-        <p14:section name="S4 · Kiểm tra nhanh" id="{7cf45ecc-2443-c422-83d4-a5318deabddd}">
+        <p14:section name="S4 · Kiểm tra nhanh" id="{7da15738-fb52-eb79-9e36-054629bba59d}">
           <p14:sldIdLst>
             <p14:sldId id="277"/>
             <p14:sldId id="278"/>
             <p14:sldId id="279"/>
           </p14:sldIdLst>
         </p14:section>
-        <p14:section name="S5 · Cấu trúc 3 phần và hình thức trực tuyến" id="{3573e9a3-0db8-81d7-d4e9-e0a532f5853e}">
+        <p14:section name="S5 · Cấu trúc 3 phần và hình thức trực tuyến" id="{21ab2db4-de2a-b5a7-092b-d3c8d3ac1194}">
           <p14:sldIdLst>
             <p14:sldId id="280"/>
             <p14:sldId id="281"/>
@@ -207,7 +207,7 @@
             <p14:sldId id="286"/>
           </p14:sldIdLst>
         </p14:section>
-        <p14:section name="S6 · Năm lỗi đặt câu hỏi: bắt lỗi nhanh" id="{3df8f68a-2224-907e-a550-30e9e1b852af}">
+        <p14:section name="S6 · Năm lỗi đặt câu hỏi: bắt lỗi nhanh" id="{8d39c3bc-089f-95ea-c364-89a5e7ffb851}">
           <p14:sldIdLst>
             <p14:sldId id="287"/>
             <p14:sldId id="288"/>
@@ -220,14 +220,14 @@
             <p14:sldId id="295"/>
           </p14:sldIdLst>
         </p14:section>
-        <p14:section name="S8 · Thực hành nhóm: Xưởng bảng hỏi" id="{64afd2df-65d9-24f3-74a2-cef23d28ac36}">
+        <p14:section name="S8 · Thực hành nhóm: Xưởng bảng hỏi" id="{d1d6099e-5985-dbb9-2a25-d146ecc11ced}">
           <p14:sldIdLst>
             <p14:sldId id="296"/>
             <p14:sldId id="297"/>
             <p14:sldId id="298"/>
           </p14:sldIdLst>
         </p14:section>
-        <p14:section name="S9 · Kết buổi" id="{53b948ef-681f-f739-0beb-281b1ff1d4f0}">
+        <p14:section name="S9 · Kết buổi" id="{e2d2b2c4-6c0f-2e81-2b6b-d49c47cbcf3d}">
           <p14:sldIdLst>
             <p14:sldId id="299"/>
             <p14:sldId id="300"/>
@@ -6344,7 +6344,7 @@
                 <a:ea typeface="Alexandria" pitchFamily="34" charset="-122"/>
                 <a:cs typeface="Alexandria" pitchFamily="34" charset="-120"/>
               </a:rPr>
-              <a:t>Dạng phỏng vấn</a:t>
+              <a:t>Dạng phỏng vấn</a:t>
             </a:r>
             <a:endParaRPr lang="en-US" sz="2600" dirty="0"/>
           </a:p>
@@ -6445,7 +6445,7 @@
                 <a:ea typeface="Alexandria" pitchFamily="34" charset="-122"/>
                 <a:cs typeface="Alexandria" pitchFamily="34" charset="-120"/>
               </a:rPr>
-              <a:t>Nội dung câu hỏi</a:t>
+              <a:t>Nội dung câu hỏi</a:t>
             </a:r>
             <a:endParaRPr lang="en-US" sz="2600" dirty="0"/>
           </a:p>
@@ -6546,7 +6546,7 @@
                 <a:ea typeface="Alexandria" pitchFamily="34" charset="-122"/>
                 <a:cs typeface="Alexandria" pitchFamily="34" charset="-120"/>
               </a:rPr>
-              <a:t>Hình thức trả lời</a:t>
+              <a:t>Hình thức trả lời</a:t>
             </a:r>
             <a:endParaRPr lang="en-US" sz="2600" dirty="0"/>
           </a:p>
@@ -7797,7 +7797,7 @@
                 <a:ea typeface="Alexandria" pitchFamily="34" charset="-122"/>
                 <a:cs typeface="Alexandria" pitchFamily="34" charset="-120"/>
               </a:rPr>
-              <a:t>Cầu nối giữa hai bên</a:t>
+              <a:t>Cầu nối giữa hai bên</a:t>
             </a:r>
             <a:endParaRPr lang="en-US" sz="2600" dirty="0"/>
           </a:p>
@@ -8288,10 +8288,10 @@
             <a:tbl>
               <a:tblPr/>
               <a:tblGrid>
-                <a:gridCol w="2996843"/>
-                <a:gridCol w="2947010"/>
-                <a:gridCol w="1894612"/>
-                <a:gridCol w="3225775"/>
+                <a:gridCol w="2089235"/>
+                <a:gridCol w="3249740"/>
+                <a:gridCol w="2089235"/>
+                <a:gridCol w="3636030"/>
               </a:tblGrid>
               <a:tr h="524256">
                 <a:tc>
@@ -8600,7 +8600,7 @@
                           <a:ea typeface="Alexandria" pitchFamily="34" charset="-122"/>
                           <a:cs typeface="Alexandria" pitchFamily="34" charset="-120"/>
                         </a:rPr>
-                        <a:t>Lọc đúng đối tượng</a:t>
+                        <a:t>Lọc đối tượng</a:t>
                       </a:r>
                       <a:endParaRPr lang="en-US" sz="2400" dirty="0">
                         <a:latin typeface="Alexandria" charset="0"/>
@@ -8886,7 +8886,7 @@
                           <a:ea typeface="Alexandria" pitchFamily="34" charset="-122"/>
                           <a:cs typeface="Alexandria" pitchFamily="34" charset="-120"/>
                         </a:rPr>
-                        <a:t>Mô tả hành vi mua</a:t>
+                        <a:t>Mô tả hành vi</a:t>
                       </a:r>
                       <a:endParaRPr lang="en-US" sz="2400" dirty="0">
                         <a:latin typeface="Alexandria" charset="0"/>
@@ -9172,7 +9172,7 @@
                           <a:ea typeface="Alexandria" pitchFamily="34" charset="-122"/>
                           <a:cs typeface="Alexandria" pitchFamily="34" charset="-120"/>
                         </a:rPr>
-                        <a:t>Đánh giá giá, chất lượng</a:t>
+                        <a:t>Giá, chất lượng</a:t>
                       </a:r>
                       <a:endParaRPr lang="en-US" sz="2400" dirty="0">
                         <a:latin typeface="Alexandria" charset="0"/>
@@ -9385,7 +9385,31 @@
                           <a:ea typeface="Alexandria" pitchFamily="34" charset="-122"/>
                           <a:cs typeface="Alexandria" pitchFamily="34" charset="-120"/>
                         </a:rPr>
-                        <a:t>Trung bình, độ lệch chuẩn</a:t>
+                        <a:t>Trung bình,</a:t>
+                      </a:r>
+                      <a:endParaRPr lang="en-US" sz="2400" dirty="0">
+                        <a:latin typeface="Alexandria" charset="0"/>
+                        <a:ea typeface="Alexandria" charset="0"/>
+                        <a:cs typeface="Alexandria" charset="0"/>
+                      </a:endParaRPr>
+                    </a:p>
+                    <a:p>
+                      <a:pPr indent="0" marL="0">
+                        <a:lnSpc>
+                          <a:spcPts val="3100"/>
+                        </a:lnSpc>
+                        <a:buNone/>
+                      </a:pPr>
+                      <a:r>
+                        <a:rPr lang="en-US" sz="2400" dirty="0">
+                          <a:solidFill>
+                            <a:srgbClr val="2E2A3A"/>
+                          </a:solidFill>
+                          <a:latin typeface="Alexandria" pitchFamily="34" charset="0"/>
+                          <a:ea typeface="Alexandria" pitchFamily="34" charset="-122"/>
+                          <a:cs typeface="Alexandria" pitchFamily="34" charset="-120"/>
+                        </a:rPr>
+                        <a:t>độ lệch chuẩn</a:t>
                       </a:r>
                       <a:endParaRPr lang="en-US" sz="2400" dirty="0">
                         <a:latin typeface="Alexandria" charset="0"/>
@@ -9458,7 +9482,7 @@
                           <a:ea typeface="Alexandria" pitchFamily="34" charset="-122"/>
                           <a:cs typeface="Alexandria" pitchFamily="34" charset="-120"/>
                         </a:rPr>
-                        <a:t>Đo ý định mua</a:t>
+                        <a:t>Ý định mua</a:t>
                       </a:r>
                       <a:endParaRPr lang="en-US" sz="2400" dirty="0">
                         <a:latin typeface="Alexandria" charset="0"/>
@@ -9671,7 +9695,31 @@
                           <a:ea typeface="Alexandria" pitchFamily="34" charset="-122"/>
                           <a:cs typeface="Alexandria" pitchFamily="34" charset="-120"/>
                         </a:rPr>
-                        <a:t>Trung bình, độ lệch chuẩn</a:t>
+                        <a:t>Trung bình,</a:t>
+                      </a:r>
+                      <a:endParaRPr lang="en-US" sz="2400" dirty="0">
+                        <a:latin typeface="Alexandria" charset="0"/>
+                        <a:ea typeface="Alexandria" charset="0"/>
+                        <a:cs typeface="Alexandria" charset="0"/>
+                      </a:endParaRPr>
+                    </a:p>
+                    <a:p>
+                      <a:pPr indent="0" marL="0">
+                        <a:lnSpc>
+                          <a:spcPts val="3100"/>
+                        </a:lnSpc>
+                        <a:buNone/>
+                      </a:pPr>
+                      <a:r>
+                        <a:rPr lang="en-US" sz="2400" dirty="0">
+                          <a:solidFill>
+                            <a:srgbClr val="2E2A3A"/>
+                          </a:solidFill>
+                          <a:latin typeface="Alexandria" pitchFamily="34" charset="0"/>
+                          <a:ea typeface="Alexandria" pitchFamily="34" charset="-122"/>
+                          <a:cs typeface="Alexandria" pitchFamily="34" charset="-120"/>
+                        </a:rPr>
+                        <a:t>độ lệch chuẩn</a:t>
                       </a:r>
                       <a:endParaRPr lang="en-US" sz="2400" dirty="0">
                         <a:latin typeface="Alexandria" charset="0"/>
@@ -9924,10 +9972,10 @@
             <a:tbl>
               <a:tblPr/>
               <a:tblGrid>
-                <a:gridCol w="2355081"/>
-                <a:gridCol w="3737167"/>
-                <a:gridCol w="2146063"/>
-                <a:gridCol w="2825929"/>
+                <a:gridCol w="2321081"/>
+                <a:gridCol w="3763081"/>
+                <a:gridCol w="2115081"/>
+                <a:gridCol w="2864998"/>
               </a:tblGrid>
               <a:tr h="524256">
                 <a:tc>
@@ -10378,7 +10426,31 @@
                           <a:ea typeface="Alexandria" pitchFamily="34" charset="-122"/>
                           <a:cs typeface="Alexandria" pitchFamily="34" charset="-120"/>
                         </a:rPr>
-                        <a:t>C5–C7, C11–C13</a:t>
+                        <a:t>C5–C7,</a:t>
+                      </a:r>
+                      <a:endParaRPr lang="en-US" sz="2400" dirty="0">
+                        <a:latin typeface="Alexandria" charset="0"/>
+                        <a:ea typeface="Alexandria" charset="0"/>
+                        <a:cs typeface="Alexandria" charset="0"/>
+                      </a:endParaRPr>
+                    </a:p>
+                    <a:p>
+                      <a:pPr indent="0" marL="0">
+                        <a:lnSpc>
+                          <a:spcPts val="3100"/>
+                        </a:lnSpc>
+                        <a:buNone/>
+                      </a:pPr>
+                      <a:r>
+                        <a:rPr lang="en-US" sz="2400" dirty="0">
+                          <a:solidFill>
+                            <a:srgbClr val="2E2A3A"/>
+                          </a:solidFill>
+                          <a:latin typeface="Alexandria" pitchFamily="34" charset="0"/>
+                          <a:ea typeface="Alexandria" pitchFamily="34" charset="-122"/>
+                          <a:cs typeface="Alexandria" pitchFamily="34" charset="-120"/>
+                        </a:rPr>
+                        <a:t>C11–C13</a:t>
                       </a:r>
                       <a:endParaRPr lang="en-US" sz="2400" dirty="0">
                         <a:latin typeface="Alexandria" charset="0"/>
@@ -10735,7 +10807,31 @@
                           <a:ea typeface="Alexandria" pitchFamily="34" charset="-122"/>
                           <a:cs typeface="Alexandria" pitchFamily="34" charset="-120"/>
                         </a:rPr>
-                        <a:t>Kiểm định khác biệt</a:t>
+                        <a:t>Kiểm định</a:t>
+                      </a:r>
+                      <a:endParaRPr lang="en-US" sz="2400" dirty="0">
+                        <a:latin typeface="Alexandria" charset="0"/>
+                        <a:ea typeface="Alexandria" charset="0"/>
+                        <a:cs typeface="Alexandria" charset="0"/>
+                      </a:endParaRPr>
+                    </a:p>
+                    <a:p>
+                      <a:pPr indent="0" marL="0">
+                        <a:lnSpc>
+                          <a:spcPts val="3100"/>
+                        </a:lnSpc>
+                        <a:buNone/>
+                      </a:pPr>
+                      <a:r>
+                        <a:rPr lang="en-US" sz="2400" dirty="0">
+                          <a:solidFill>
+                            <a:srgbClr val="2E2A3A"/>
+                          </a:solidFill>
+                          <a:latin typeface="Alexandria" pitchFamily="34" charset="0"/>
+                          <a:ea typeface="Alexandria" pitchFamily="34" charset="-122"/>
+                          <a:cs typeface="Alexandria" pitchFamily="34" charset="-120"/>
+                        </a:rPr>
+                        <a:t>khác biệt</a:t>
                       </a:r>
                       <a:endParaRPr lang="en-US" sz="2400" dirty="0">
                         <a:latin typeface="Alexandria" charset="0"/>
@@ -10879,7 +10975,31 @@
                           <a:ea typeface="Alexandria" pitchFamily="34" charset="-122"/>
                           <a:cs typeface="Alexandria" pitchFamily="34" charset="-120"/>
                         </a:rPr>
-                        <a:t>Giới tính, năm học, chi tiêu</a:t>
+                        <a:t>Giới tính, năm học,</a:t>
+                      </a:r>
+                      <a:endParaRPr lang="en-US" sz="2400" dirty="0">
+                        <a:latin typeface="Alexandria" charset="0"/>
+                        <a:ea typeface="Alexandria" charset="0"/>
+                        <a:cs typeface="Alexandria" charset="0"/>
+                      </a:endParaRPr>
+                    </a:p>
+                    <a:p>
+                      <a:pPr indent="0" marL="0">
+                        <a:lnSpc>
+                          <a:spcPts val="3100"/>
+                        </a:lnSpc>
+                        <a:buNone/>
+                      </a:pPr>
+                      <a:r>
+                        <a:rPr lang="en-US" sz="2400" dirty="0">
+                          <a:solidFill>
+                            <a:srgbClr val="2E2A3A"/>
+                          </a:solidFill>
+                          <a:latin typeface="Alexandria" pitchFamily="34" charset="0"/>
+                          <a:ea typeface="Alexandria" pitchFamily="34" charset="-122"/>
+                          <a:cs typeface="Alexandria" pitchFamily="34" charset="-120"/>
+                        </a:rPr>
+                        <a:t>chi tiêu</a:t>
                       </a:r>
                       <a:endParaRPr lang="en-US" sz="2400" dirty="0">
                         <a:latin typeface="Alexandria" charset="0"/>
@@ -11911,7 +12031,7 @@
                 <a:ea typeface="Alexandria" pitchFamily="34" charset="-122"/>
                 <a:cs typeface="Alexandria" pitchFamily="34" charset="-120"/>
               </a:rPr>
-              <a:t>Sau 150 phiếu: không sửa được</a:t>
+              <a:t>Sau 150 phiếu: không sửa được</a:t>
             </a:r>
             <a:endParaRPr lang="en-US" sz="2600" dirty="0"/>
           </a:p>
@@ -13754,7 +13874,7 @@
                 <a:ea typeface="Alexandria" pitchFamily="34" charset="-122"/>
                 <a:cs typeface="Alexandria" pitchFamily="34" charset="-120"/>
               </a:rPr>
-              <a:t>Không ai đứng cạnh để giải thích</a:t>
+              <a:t>Không ai đứng cạnh để giải thích</a:t>
             </a:r>
             <a:endParaRPr lang="en-US" sz="2600" dirty="0"/>
           </a:p>
@@ -14084,7 +14204,7 @@
                 <a:ea typeface="Alexandria" pitchFamily="34" charset="-122"/>
                 <a:cs typeface="Alexandria" pitchFamily="34" charset="-120"/>
               </a:rPr>
-              <a:t>Phần lớn trả lời trên điện thoại</a:t>
+              <a:t>Phần lớn trả lời trên điện thoại</a:t>
             </a:r>
             <a:endParaRPr lang="en-US" sz="2600" dirty="0"/>
           </a:p>
@@ -15315,7 +15435,7 @@
         </p:nvSpPr>
         <p:spPr>
           <a:xfrm>
-            <a:off x="822960" y="2962910"/>
+            <a:off x="822960" y="2946400"/>
             <a:ext cx="182880" cy="182880"/>
           </a:xfrm>
           <a:prstGeom prst="ellipse">
@@ -15336,7 +15456,7 @@
         <p:spPr>
           <a:xfrm>
             <a:off x="1097280" y="2763520"/>
-            <a:ext cx="4709160" cy="1010920"/>
+            <a:ext cx="4709160" cy="944880"/>
           </a:xfrm>
           <a:prstGeom prst="rect">
             <a:avLst/>
@@ -15350,12 +15470,12 @@
           <a:p>
             <a:pPr algn="l" indent="0" marL="0">
               <a:lnSpc>
-                <a:spcPts val="3400"/>
+                <a:spcPts val="3100"/>
               </a:lnSpc>
               <a:buNone/>
             </a:pPr>
             <a:r>
-              <a:rPr lang="en-US" sz="2600" dirty="0">
+              <a:rPr lang="en-US" sz="2400" dirty="0">
                 <a:solidFill>
                   <a:srgbClr val="2E2A3A"/>
                 </a:solidFill>
@@ -15365,7 +15485,7 @@
               </a:rPr>
               <a:t>“Thu nhập hàng tháng của bạn là bao nhiêu?”</a:t>
             </a:r>
-            <a:endParaRPr lang="en-US" sz="2600" dirty="0"/>
+            <a:endParaRPr lang="en-US" sz="2400" dirty="0"/>
           </a:p>
         </p:txBody>
       </p:sp>
@@ -15463,7 +15583,7 @@
         </p:nvSpPr>
         <p:spPr>
           <a:xfrm>
-            <a:off x="6492240" y="2962910"/>
+            <a:off x="6492240" y="2946400"/>
             <a:ext cx="182880" cy="182880"/>
           </a:xfrm>
           <a:prstGeom prst="ellipse">
@@ -15484,7 +15604,7 @@
         <p:spPr>
           <a:xfrm>
             <a:off x="6766560" y="2763520"/>
-            <a:ext cx="4709160" cy="581660"/>
+            <a:ext cx="4709160" cy="548640"/>
           </a:xfrm>
           <a:prstGeom prst="rect">
             <a:avLst/>
@@ -15498,12 +15618,12 @@
           <a:p>
             <a:pPr algn="l" indent="0" marL="0">
               <a:lnSpc>
-                <a:spcPts val="3400"/>
+                <a:spcPts val="3100"/>
               </a:lnSpc>
               <a:buNone/>
             </a:pPr>
             <a:r>
-              <a:rPr lang="en-US" sz="2600" dirty="0">
+              <a:rPr lang="en-US" sz="2400" dirty="0">
                 <a:solidFill>
                   <a:srgbClr val="2E2A3A"/>
                 </a:solidFill>
@@ -15513,7 +15633,7 @@
               </a:rPr>
               <a:t>Dưới 3 triệu</a:t>
             </a:r>
-            <a:endParaRPr lang="en-US" sz="2600" dirty="0"/>
+            <a:endParaRPr lang="en-US" sz="2400" dirty="0"/>
           </a:p>
         </p:txBody>
       </p:sp>
@@ -15525,7 +15645,7 @@
         </p:nvSpPr>
         <p:spPr>
           <a:xfrm>
-            <a:off x="6492240" y="3681730"/>
+            <a:off x="6492240" y="3632200"/>
             <a:ext cx="182880" cy="182880"/>
           </a:xfrm>
           <a:prstGeom prst="ellipse">
@@ -15545,8 +15665,8 @@
         </p:nvSpPr>
         <p:spPr>
           <a:xfrm>
-            <a:off x="6766560" y="3482340"/>
-            <a:ext cx="4709160" cy="581660"/>
+            <a:off x="6766560" y="3449320"/>
+            <a:ext cx="4709160" cy="548640"/>
           </a:xfrm>
           <a:prstGeom prst="rect">
             <a:avLst/>
@@ -15560,12 +15680,12 @@
           <a:p>
             <a:pPr algn="l" indent="0" marL="0">
               <a:lnSpc>
-                <a:spcPts val="3400"/>
+                <a:spcPts val="3100"/>
               </a:lnSpc>
               <a:buNone/>
             </a:pPr>
             <a:r>
-              <a:rPr lang="en-US" sz="2600" dirty="0">
+              <a:rPr lang="en-US" sz="2400" dirty="0">
                 <a:solidFill>
                   <a:srgbClr val="2E2A3A"/>
                 </a:solidFill>
@@ -15575,7 +15695,7 @@
               </a:rPr>
               <a:t>Từ 3 đến dưới 5 triệu</a:t>
             </a:r>
-            <a:endParaRPr lang="en-US" sz="2600" dirty="0"/>
+            <a:endParaRPr lang="en-US" sz="2400" dirty="0"/>
           </a:p>
         </p:txBody>
       </p:sp>
@@ -15587,7 +15707,7 @@
         </p:nvSpPr>
         <p:spPr>
           <a:xfrm>
-            <a:off x="6492240" y="4400550"/>
+            <a:off x="6492240" y="4318000"/>
             <a:ext cx="182880" cy="182880"/>
           </a:xfrm>
           <a:prstGeom prst="ellipse">
@@ -15607,8 +15727,8 @@
         </p:nvSpPr>
         <p:spPr>
           <a:xfrm>
-            <a:off x="6766560" y="4201160"/>
-            <a:ext cx="4709160" cy="581660"/>
+            <a:off x="6766560" y="4135120"/>
+            <a:ext cx="4709160" cy="548640"/>
           </a:xfrm>
           <a:prstGeom prst="rect">
             <a:avLst/>
@@ -15622,12 +15742,12 @@
           <a:p>
             <a:pPr algn="l" indent="0" marL="0">
               <a:lnSpc>
-                <a:spcPts val="3400"/>
+                <a:spcPts val="3100"/>
               </a:lnSpc>
               <a:buNone/>
             </a:pPr>
             <a:r>
-              <a:rPr lang="en-US" sz="2600" dirty="0">
+              <a:rPr lang="en-US" sz="2400" dirty="0">
                 <a:solidFill>
                   <a:srgbClr val="2E2A3A"/>
                 </a:solidFill>
@@ -15637,7 +15757,7 @@
               </a:rPr>
               <a:t>Từ 5 đến dưới 7 triệu</a:t>
             </a:r>
-            <a:endParaRPr lang="en-US" sz="2600" dirty="0"/>
+            <a:endParaRPr lang="en-US" sz="2400" dirty="0"/>
           </a:p>
         </p:txBody>
       </p:sp>
@@ -15649,7 +15769,7 @@
         </p:nvSpPr>
         <p:spPr>
           <a:xfrm>
-            <a:off x="6492240" y="5119370"/>
+            <a:off x="6492240" y="5003800"/>
             <a:ext cx="182880" cy="182880"/>
           </a:xfrm>
           <a:prstGeom prst="ellipse">
@@ -15669,8 +15789,8 @@
         </p:nvSpPr>
         <p:spPr>
           <a:xfrm>
-            <a:off x="6766560" y="4919980"/>
-            <a:ext cx="4709160" cy="1010920"/>
+            <a:off x="6766560" y="4820920"/>
+            <a:ext cx="4709160" cy="548640"/>
           </a:xfrm>
           <a:prstGeom prst="rect">
             <a:avLst/>
@@ -15684,12 +15804,12 @@
           <a:p>
             <a:pPr algn="l" indent="0" marL="0">
               <a:lnSpc>
-                <a:spcPts val="3400"/>
+                <a:spcPts val="3100"/>
               </a:lnSpc>
               <a:buNone/>
             </a:pPr>
             <a:r>
-              <a:rPr lang="en-US" sz="2600" dirty="0">
+              <a:rPr lang="en-US" sz="2400" dirty="0">
                 <a:solidFill>
                   <a:srgbClr val="2E2A3A"/>
                 </a:solidFill>
@@ -15697,9 +15817,71 @@
                 <a:ea typeface="Alexandria" pitchFamily="34" charset="-122"/>
                 <a:cs typeface="Alexandria" pitchFamily="34" charset="-120"/>
               </a:rPr>
-              <a:t>Từ 7 triệu trở lên · Không muốn trả lời</a:t>
-            </a:r>
-            <a:endParaRPr lang="en-US" sz="2600" dirty="0"/>
+              <a:t>Từ 7 triệu trở lên</a:t>
+            </a:r>
+            <a:endParaRPr lang="en-US" sz="2400" dirty="0"/>
+          </a:p>
+        </p:txBody>
+      </p:sp>
+      <p:sp>
+        <p:nvSpPr>
+          <p:cNvPr id="22" name="Dấu đầu dòng"/>
+          <p:cNvSpPr/>
+          <p:nvPr/>
+        </p:nvSpPr>
+        <p:spPr>
+          <a:xfrm>
+            <a:off x="6492240" y="5689600"/>
+            <a:ext cx="182880" cy="182880"/>
+          </a:xfrm>
+          <a:prstGeom prst="ellipse">
+            <a:avLst/>
+          </a:prstGeom>
+          <a:solidFill>
+            <a:srgbClr val="FF9259"/>
+          </a:solidFill>
+          <a:ln/>
+        </p:spPr>
+      </p:sp>
+      <p:sp>
+        <p:nvSpPr>
+          <p:cNvPr id="23" name="Text 21"/>
+          <p:cNvSpPr txBox="1"/>
+          <p:nvPr/>
+        </p:nvSpPr>
+        <p:spPr>
+          <a:xfrm>
+            <a:off x="6766560" y="5506720"/>
+            <a:ext cx="4709160" cy="548640"/>
+          </a:xfrm>
+          <a:prstGeom prst="rect">
+            <a:avLst/>
+          </a:prstGeom>
+          <a:noFill/>
+          <a:ln/>
+        </p:spPr>
+        <p:txBody>
+          <a:bodyPr wrap="square" lIns="76200" tIns="76200" rIns="76200" bIns="76200" rtlCol="0" anchor="t"/>
+          <a:lstStyle/>
+          <a:p>
+            <a:pPr algn="l" indent="0" marL="0">
+              <a:lnSpc>
+                <a:spcPts val="3100"/>
+              </a:lnSpc>
+              <a:buNone/>
+            </a:pPr>
+            <a:r>
+              <a:rPr lang="en-US" sz="2400" dirty="0">
+                <a:solidFill>
+                  <a:srgbClr val="2E2A3A"/>
+                </a:solidFill>
+                <a:latin typeface="Alexandria" pitchFamily="34" charset="0"/>
+                <a:ea typeface="Alexandria" pitchFamily="34" charset="-122"/>
+                <a:cs typeface="Alexandria" pitchFamily="34" charset="-120"/>
+              </a:rPr>
+              <a:t>Không muốn trả lời</a:t>
+            </a:r>
+            <a:endParaRPr lang="en-US" sz="2400" dirty="0"/>
           </a:p>
         </p:txBody>
       </p:sp>
@@ -17231,7 +17413,7 @@
                 <a:ea typeface="Alexandria" pitchFamily="34" charset="-122"/>
                 <a:cs typeface="Alexandria" pitchFamily="34" charset="-120"/>
               </a:rPr>
-              <a:t>Giá · Mùi hương · Bao bì: 1 = quan trọng nhất, 3 = ít quan trọng nhất</a:t>
+              <a:t>Giá · Mùi hương · Bao bì: 1 = quan trọng nhất, 3 = ít quan trọng nhất</a:t>
             </a:r>
             <a:endParaRPr lang="en-US" sz="2600" dirty="0"/>
           </a:p>
@@ -21196,22 +21378,20 @@
       </p:sp>
       <p:sp>
         <p:nvSpPr>
-          <p:cNvPr id="15" name="Tiêu đề cột"/>
-          <p:cNvSpPr/>
-          <p:nvPr/>
-        </p:nvSpPr>
-        <p:spPr>
-          <a:xfrm>
-            <a:off x="6492240" y="1783080"/>
-            <a:ext cx="5120640" cy="706120"/>
-          </a:xfrm>
-          <a:prstGeom prst="roundRect">
-            <a:avLst>
-              <a:gd name="adj" fmla="val 23309"/>
-            </a:avLst>
-          </a:prstGeom>
-          <a:solidFill>
-            <a:srgbClr val="09A1E5"/>
+          <p:cNvPr id="15" name="Dấu đầu dòng"/>
+          <p:cNvSpPr/>
+          <p:nvPr/>
+        </p:nvSpPr>
+        <p:spPr>
+          <a:xfrm>
+            <a:off x="822960" y="3731260"/>
+            <a:ext cx="182880" cy="182880"/>
+          </a:xfrm>
+          <a:prstGeom prst="ellipse">
+            <a:avLst/>
+          </a:prstGeom>
+          <a:solidFill>
+            <a:srgbClr val="49B296"/>
           </a:solidFill>
           <a:ln/>
         </p:spPr>
@@ -21224,8 +21404,8 @@
         </p:nvSpPr>
         <p:spPr>
           <a:xfrm>
-            <a:off x="6629400" y="1783080"/>
-            <a:ext cx="4846320" cy="706120"/>
+            <a:off x="1097280" y="3515360"/>
+            <a:ext cx="4434840" cy="614680"/>
           </a:xfrm>
           <a:prstGeom prst="rect">
             <a:avLst/>
@@ -21234,7 +21414,7 @@
           <a:ln/>
         </p:spPr>
         <p:txBody>
-          <a:bodyPr wrap="square" lIns="76200" tIns="76200" rIns="76200" bIns="76200" rtlCol="0" anchor="ctr"/>
+          <a:bodyPr wrap="square" lIns="76200" tIns="76200" rIns="76200" bIns="76200" rtlCol="0" anchor="t"/>
           <a:lstStyle/>
           <a:p>
             <a:pPr algn="l" indent="0" marL="0">
@@ -21244,7 +21424,7 @@
               <a:buNone/>
             </a:pPr>
             <a:r>
-              <a:rPr lang="en-US" sz="2800" b="1" dirty="0">
+              <a:rPr lang="en-US" sz="2800" dirty="0">
                 <a:solidFill>
                   <a:srgbClr val="2E2A3A"/>
                 </a:solidFill>
@@ -21252,7 +21432,7 @@
                 <a:ea typeface="Alexandria" pitchFamily="34" charset="-122"/>
                 <a:cs typeface="Alexandria" pitchFamily="34" charset="-120"/>
               </a:rPr>
-              <a:t>Chưa từng → Cảm ơn</a:t>
+              <a:t>Đủ thông tin để trả lời</a:t>
             </a:r>
             <a:endParaRPr lang="en-US" sz="2800" dirty="0"/>
           </a:p>
@@ -21260,41 +21440,21 @@
       </p:sp>
       <p:sp>
         <p:nvSpPr>
-          <p:cNvPr id="17" name="Nội dung cột"/>
-          <p:cNvSpPr/>
-          <p:nvPr/>
-        </p:nvSpPr>
-        <p:spPr>
-          <a:xfrm>
-            <a:off x="6492240" y="2626360"/>
-            <a:ext cx="5120640" cy="2494280"/>
+          <p:cNvPr id="17" name="Tiêu đề cột"/>
+          <p:cNvSpPr/>
+          <p:nvPr/>
+        </p:nvSpPr>
+        <p:spPr>
+          <a:xfrm>
+            <a:off x="6492240" y="1783080"/>
+            <a:ext cx="5120640" cy="706120"/>
           </a:xfrm>
           <a:prstGeom prst="roundRect">
             <a:avLst>
-              <a:gd name="adj" fmla="val 6599"/>
+              <a:gd name="adj" fmla="val 23309"/>
             </a:avLst>
           </a:prstGeom>
           <a:solidFill>
-            <a:srgbClr val="D4ECF2"/>
-          </a:solidFill>
-          <a:ln/>
-        </p:spPr>
-      </p:sp>
-      <p:sp>
-        <p:nvSpPr>
-          <p:cNvPr id="18" name="Dấu đầu dòng"/>
-          <p:cNvSpPr/>
-          <p:nvPr/>
-        </p:nvSpPr>
-        <p:spPr>
-          <a:xfrm>
-            <a:off x="6766560" y="2979420"/>
-            <a:ext cx="182880" cy="182880"/>
-          </a:xfrm>
-          <a:prstGeom prst="ellipse">
-            <a:avLst/>
-          </a:prstGeom>
-          <a:solidFill>
             <a:srgbClr val="09A1E5"/>
           </a:solidFill>
           <a:ln/>
@@ -21302,14 +21462,14 @@
       </p:sp>
       <p:sp>
         <p:nvSpPr>
-          <p:cNvPr id="19" name="Text 17"/>
+          <p:cNvPr id="18" name="Text 16"/>
           <p:cNvSpPr txBox="1"/>
           <p:nvPr/>
         </p:nvSpPr>
         <p:spPr>
           <a:xfrm>
-            <a:off x="7040880" y="2763520"/>
-            <a:ext cx="4434840" cy="614680"/>
+            <a:off x="6629400" y="1783080"/>
+            <a:ext cx="4846320" cy="706120"/>
           </a:xfrm>
           <a:prstGeom prst="rect">
             <a:avLst/>
@@ -21318,7 +21478,7 @@
           <a:ln/>
         </p:spPr>
         <p:txBody>
-          <a:bodyPr wrap="square" lIns="76200" tIns="76200" rIns="76200" bIns="76200" rtlCol="0" anchor="t"/>
+          <a:bodyPr wrap="square" lIns="76200" tIns="76200" rIns="76200" bIns="76200" rtlCol="0" anchor="ctr"/>
           <a:lstStyle/>
           <a:p>
             <a:pPr algn="l" indent="0" marL="0">
@@ -21328,6 +21488,90 @@
               <a:buNone/>
             </a:pPr>
             <a:r>
+              <a:rPr lang="en-US" sz="2800" b="1" dirty="0">
+                <a:solidFill>
+                  <a:srgbClr val="2E2A3A"/>
+                </a:solidFill>
+                <a:latin typeface="Alexandria" pitchFamily="34" charset="0"/>
+                <a:ea typeface="Alexandria" pitchFamily="34" charset="-122"/>
+                <a:cs typeface="Alexandria" pitchFamily="34" charset="-120"/>
+              </a:rPr>
+              <a:t>Chưa từng → Cảm ơn</a:t>
+            </a:r>
+            <a:endParaRPr lang="en-US" sz="2800" dirty="0"/>
+          </a:p>
+        </p:txBody>
+      </p:sp>
+      <p:sp>
+        <p:nvSpPr>
+          <p:cNvPr id="19" name="Nội dung cột"/>
+          <p:cNvSpPr/>
+          <p:nvPr/>
+        </p:nvSpPr>
+        <p:spPr>
+          <a:xfrm>
+            <a:off x="6492240" y="2626360"/>
+            <a:ext cx="5120640" cy="2494280"/>
+          </a:xfrm>
+          <a:prstGeom prst="roundRect">
+            <a:avLst>
+              <a:gd name="adj" fmla="val 6599"/>
+            </a:avLst>
+          </a:prstGeom>
+          <a:solidFill>
+            <a:srgbClr val="D4ECF2"/>
+          </a:solidFill>
+          <a:ln/>
+        </p:spPr>
+      </p:sp>
+      <p:sp>
+        <p:nvSpPr>
+          <p:cNvPr id="20" name="Dấu đầu dòng"/>
+          <p:cNvSpPr/>
+          <p:nvPr/>
+        </p:nvSpPr>
+        <p:spPr>
+          <a:xfrm>
+            <a:off x="6766560" y="2979420"/>
+            <a:ext cx="182880" cy="182880"/>
+          </a:xfrm>
+          <a:prstGeom prst="ellipse">
+            <a:avLst/>
+          </a:prstGeom>
+          <a:solidFill>
+            <a:srgbClr val="09A1E5"/>
+          </a:solidFill>
+          <a:ln/>
+        </p:spPr>
+      </p:sp>
+      <p:sp>
+        <p:nvSpPr>
+          <p:cNvPr id="21" name="Text 19"/>
+          <p:cNvSpPr txBox="1"/>
+          <p:nvPr/>
+        </p:nvSpPr>
+        <p:spPr>
+          <a:xfrm>
+            <a:off x="7040880" y="2763520"/>
+            <a:ext cx="4434840" cy="614680"/>
+          </a:xfrm>
+          <a:prstGeom prst="rect">
+            <a:avLst/>
+          </a:prstGeom>
+          <a:noFill/>
+          <a:ln/>
+        </p:spPr>
+        <p:txBody>
+          <a:bodyPr wrap="square" lIns="76200" tIns="76200" rIns="76200" bIns="76200" rtlCol="0" anchor="t"/>
+          <a:lstStyle/>
+          <a:p>
+            <a:pPr algn="l" indent="0" marL="0">
+              <a:lnSpc>
+                <a:spcPts val="3600"/>
+              </a:lnSpc>
+              <a:buNone/>
+            </a:pPr>
+            <a:r>
               <a:rPr lang="en-US" sz="2800" dirty="0">
                 <a:solidFill>
                   <a:srgbClr val="2E2A3A"/>
@@ -21344,7 +21588,69 @@
       </p:sp>
       <p:sp>
         <p:nvSpPr>
-          <p:cNvPr id="20" name="Nhãn vs"/>
+          <p:cNvPr id="22" name="Dấu đầu dòng"/>
+          <p:cNvSpPr/>
+          <p:nvPr/>
+        </p:nvSpPr>
+        <p:spPr>
+          <a:xfrm>
+            <a:off x="6766560" y="3731260"/>
+            <a:ext cx="182880" cy="182880"/>
+          </a:xfrm>
+          <a:prstGeom prst="ellipse">
+            <a:avLst/>
+          </a:prstGeom>
+          <a:solidFill>
+            <a:srgbClr val="09A1E5"/>
+          </a:solidFill>
+          <a:ln/>
+        </p:spPr>
+      </p:sp>
+      <p:sp>
+        <p:nvSpPr>
+          <p:cNvPr id="23" name="Text 21"/>
+          <p:cNvSpPr txBox="1"/>
+          <p:nvPr/>
+        </p:nvSpPr>
+        <p:spPr>
+          <a:xfrm>
+            <a:off x="7040880" y="3515360"/>
+            <a:ext cx="4434840" cy="614680"/>
+          </a:xfrm>
+          <a:prstGeom prst="rect">
+            <a:avLst/>
+          </a:prstGeom>
+          <a:noFill/>
+          <a:ln/>
+        </p:spPr>
+        <p:txBody>
+          <a:bodyPr wrap="square" lIns="76200" tIns="76200" rIns="76200" bIns="76200" rtlCol="0" anchor="t"/>
+          <a:lstStyle/>
+          <a:p>
+            <a:pPr algn="l" indent="0" marL="0">
+              <a:lnSpc>
+                <a:spcPts val="3600"/>
+              </a:lnSpc>
+              <a:buNone/>
+            </a:pPr>
+            <a:r>
+              <a:rPr lang="en-US" sz="2800" dirty="0">
+                <a:solidFill>
+                  <a:srgbClr val="2E2A3A"/>
+                </a:solidFill>
+                <a:latin typeface="Alexandria" pitchFamily="34" charset="0"/>
+                <a:ea typeface="Alexandria" pitchFamily="34" charset="-122"/>
+                <a:cs typeface="Alexandria" pitchFamily="34" charset="-120"/>
+              </a:rPr>
+              <a:t>Không làm bẩn dữ liệu</a:t>
+            </a:r>
+            <a:endParaRPr lang="en-US" sz="2800" dirty="0"/>
+          </a:p>
+        </p:txBody>
+      </p:sp>
+      <p:sp>
+        <p:nvSpPr>
+          <p:cNvPr id="24" name="Nhãn vs"/>
           <p:cNvSpPr/>
           <p:nvPr/>
         </p:nvSpPr>
@@ -21364,7 +21670,7 @@
       </p:sp>
       <p:sp>
         <p:nvSpPr>
-          <p:cNvPr id="21" name="Text 19"/>
+          <p:cNvPr id="25" name="Text 23"/>
           <p:cNvSpPr txBox="1"/>
           <p:nvPr/>
         </p:nvSpPr>
@@ -22301,7 +22607,7 @@
                 <a:ea typeface="Alexandria" pitchFamily="34" charset="-122"/>
                 <a:cs typeface="Alexandria" pitchFamily="34" charset="-120"/>
               </a:rPr>
-              <a:t>Bỏ qua câu không liên quan</a:t>
+              <a:t>Bỏ qua câu không liên quan</a:t>
             </a:r>
             <a:endParaRPr lang="en-US" sz="2500" dirty="0"/>
           </a:p>
@@ -22763,7 +23069,7 @@
                 <a:ea typeface="Alexandria" pitchFamily="34" charset="-122"/>
                 <a:cs typeface="Alexandria" pitchFamily="34" charset="-120"/>
               </a:rPr>
-              <a:t>Mỗi khái niệm từ 3 biến, có mã và nguồn</a:t>
+              <a:t>Mỗi khái niệm từ 3 biến, có mã và nguồn</a:t>
             </a:r>
             <a:endParaRPr lang="en-US" sz="2600" dirty="0"/>
           </a:p>
@@ -23885,7 +24191,7 @@
                 <a:ea typeface="Alexandria" pitchFamily="34" charset="-122"/>
                 <a:cs typeface="Alexandria" pitchFamily="34" charset="-120"/>
               </a:rPr>
-              <a:t>Chỉ hỏi thông tin dùng trong phân tích</a:t>
+              <a:t>Chỉ hỏi thông tin dùng trong phân tích</a:t>
             </a:r>
             <a:endParaRPr lang="en-US" sz="2600" dirty="0"/>
           </a:p>
@@ -25806,7 +26112,7 @@
                 <a:ea typeface="Alexandria" pitchFamily="34" charset="-122"/>
                 <a:cs typeface="Alexandria" pitchFamily="34" charset="-120"/>
               </a:rPr>
-              <a:t>Đẩy về một đáp án</a:t>
+              <a:t>Đẩy về một đáp án</a:t>
             </a:r>
             <a:endParaRPr lang="en-US" sz="2600" dirty="0"/>
           </a:p>
@@ -32270,7 +32576,7 @@
                 <a:ea typeface="Alexandria" pitchFamily="34" charset="-122"/>
                 <a:cs typeface="Alexandria" pitchFamily="34" charset="-120"/>
               </a:rPr>
-              <a:t>Bước 8: thử trước khi phát hành — bảng hỏi đã gửi đi thì không sửa được</a:t>
+              <a:t>Bước 8: thử trước khi phát hành — bảng hỏi đã gửi đi thì không sửa được</a:t>
             </a:r>
             <a:endParaRPr lang="en-US" sz="3400" dirty="0"/>
           </a:p>
@@ -37969,7 +38275,7 @@
                 <a:ea typeface="Alexandria" pitchFamily="34" charset="-122"/>
                 <a:cs typeface="Alexandria" pitchFamily="34" charset="-120"/>
               </a:rPr>
-              <a:t>ĐL: bảng hỏi 3 phần · ĐT: dàn bài phỏng vấn</a:t>
+              <a:t>ĐL: bảng hỏi 3 phần; ĐT: dàn bài phỏng vấn</a:t>
             </a:r>
             <a:endParaRPr lang="en-US" sz="2600" dirty="0"/>
           </a:p>
@@ -39787,7 +40093,7 @@
                 <a:ea typeface="Alexandria" pitchFamily="34" charset="-122"/>
                 <a:cs typeface="Alexandria" pitchFamily="34" charset="-120"/>
               </a:rPr>
-              <a:t>Đủ cho kế hoạch phân tích</a:t>
+              <a:t>Đủ cho kế hoạch phân tích</a:t>
             </a:r>
             <a:endParaRPr lang="en-US" sz="2700" dirty="0"/>
           </a:p>

--- a/mkt1107/output/MKT1107_W10_slides.pptx
+++ b/mkt1107/output/MKT1107_W10_slides.pptx
@@ -152,19 +152,19 @@
   <p:extLst>
     <p:ext uri="{521415D9-36F7-43E2-AB2F-B90AF26B5E84}">
       <p14:sectionLst xmlns:p14="http://schemas.microsoft.com/office/powerpoint/2010/main">
-        <p14:section name="Mở đầu" id="{b90d166c-9aba-7747-7d17-205b84e841a4}">
+        <p14:section name="Mở đầu" id="{764eeafb-d06c-9c56-9f03-32639a289f98}">
           <p14:sldIdLst>
             <p14:sldId id="256"/>
           </p14:sldIdLst>
         </p14:section>
-        <p14:section name="S1 · Khởi động: kiểm tra bài tập Buổi 9" id="{44183cda-e9ff-3b99-1c24-bf6f4e80bfba}">
+        <p14:section name="S1 · Khởi động: kiểm tra bài tập Buổi 9" id="{22b11b09-5024-cad4-b9a6-334e954ec82f}">
           <p14:sldIdLst>
             <p14:sldId id="257"/>
             <p14:sldId id="258"/>
             <p14:sldId id="259"/>
           </p14:sldIdLst>
         </p14:section>
-        <p14:section name="S2 · Bảng câu hỏi là gì, cần gì, đi qua mấy bước" id="{a37adabe-76dd-0ee0-e841-ddf300658b9b}">
+        <p14:section name="S2 · Bảng câu hỏi là gì, cần gì, đi qua mấy bước" id="{cea1ad79-9cc4-11f7-aa14-093612986998}">
           <p14:sldIdLst>
             <p14:sldId id="260"/>
             <p14:sldId id="261"/>
@@ -174,7 +174,7 @@
             <p14:sldId id="265"/>
           </p14:sldIdLst>
         </p14:section>
-        <p14:section name="S3 · Từ mục tiêu đến câu hỏi: bước 1–4" id="{a0ab9a22-985f-f7ec-900d-b12f9c4f5263}">
+        <p14:section name="S3 · Từ mục tiêu đến câu hỏi: bước 1–4" id="{4823e7b3-2d79-655e-01a9-5506e1b2796d}">
           <p14:sldIdLst>
             <p14:sldId id="266"/>
             <p14:sldId id="267"/>
@@ -189,14 +189,14 @@
             <p14:sldId id="276"/>
           </p14:sldIdLst>
         </p14:section>
-        <p14:section name="S4 · Kiểm tra nhanh" id="{7da15738-fb52-eb79-9e36-054629bba59d}">
+        <p14:section name="S4 · Kiểm tra nhanh" id="{91e4f924-31a2-ac97-2361-74b31f3d4a1c}">
           <p14:sldIdLst>
             <p14:sldId id="277"/>
             <p14:sldId id="278"/>
             <p14:sldId id="279"/>
           </p14:sldIdLst>
         </p14:section>
-        <p14:section name="S5 · Cấu trúc 3 phần và hình thức trực tuyến" id="{21ab2db4-de2a-b5a7-092b-d3c8d3ac1194}">
+        <p14:section name="S5 · Cấu trúc 3 phần và hình thức trực tuyến" id="{bd6e8f38-277d-d16a-9aa5-909bdaa4266d}">
           <p14:sldIdLst>
             <p14:sldId id="280"/>
             <p14:sldId id="281"/>
@@ -207,7 +207,7 @@
             <p14:sldId id="286"/>
           </p14:sldIdLst>
         </p14:section>
-        <p14:section name="S6 · Năm lỗi đặt câu hỏi: bắt lỗi nhanh" id="{8d39c3bc-089f-95ea-c364-89a5e7ffb851}">
+        <p14:section name="S6 · Năm lỗi đặt câu hỏi: bắt lỗi nhanh" id="{76a6e495-a56b-772d-a547-db2a8eb98d10}">
           <p14:sldIdLst>
             <p14:sldId id="287"/>
             <p14:sldId id="288"/>
@@ -220,14 +220,14 @@
             <p14:sldId id="295"/>
           </p14:sldIdLst>
         </p14:section>
-        <p14:section name="S8 · Thực hành nhóm: Xưởng bảng hỏi" id="{d1d6099e-5985-dbb9-2a25-d146ecc11ced}">
+        <p14:section name="S8 · Thực hành nhóm: Xưởng bảng hỏi" id="{6c8ec69d-e2d4-37a6-86d3-3cab7df04a7f}">
           <p14:sldIdLst>
             <p14:sldId id="296"/>
             <p14:sldId id="297"/>
             <p14:sldId id="298"/>
           </p14:sldIdLst>
         </p14:section>
-        <p14:section name="S9 · Kết buổi" id="{e2d2b2c4-6c0f-2e81-2b6b-d49c47cbcf3d}">
+        <p14:section name="S9 · Kết buổi" id="{b2c759eb-e36a-4d89-ac93-af7e50986dea}">
           <p14:sldIdLst>
             <p14:sldId id="299"/>
             <p14:sldId id="300"/>
@@ -8288,10 +8288,10 @@
             <a:tbl>
               <a:tblPr/>
               <a:tblGrid>
-                <a:gridCol w="2089235"/>
-                <a:gridCol w="3249740"/>
-                <a:gridCol w="2089235"/>
-                <a:gridCol w="3636030"/>
+                <a:gridCol w="2428782"/>
+                <a:gridCol w="3777894"/>
+                <a:gridCol w="2428782"/>
+                <a:gridCol w="2428782"/>
               </a:tblGrid>
               <a:tr h="524256">
                 <a:tc>
@@ -8600,7 +8600,31 @@
                           <a:ea typeface="Alexandria" pitchFamily="34" charset="-122"/>
                           <a:cs typeface="Alexandria" pitchFamily="34" charset="-120"/>
                         </a:rPr>
-                        <a:t>Lọc đối tượng</a:t>
+                        <a:t>Lọc đúng</a:t>
+                      </a:r>
+                      <a:endParaRPr lang="en-US" sz="2400" dirty="0">
+                        <a:latin typeface="Alexandria" charset="0"/>
+                        <a:ea typeface="Alexandria" charset="0"/>
+                        <a:cs typeface="Alexandria" charset="0"/>
+                      </a:endParaRPr>
+                    </a:p>
+                    <a:p>
+                      <a:pPr indent="0" marL="0">
+                        <a:lnSpc>
+                          <a:spcPts val="3100"/>
+                        </a:lnSpc>
+                        <a:buNone/>
+                      </a:pPr>
+                      <a:r>
+                        <a:rPr lang="en-US" sz="2400" b="1" dirty="0">
+                          <a:solidFill>
+                            <a:srgbClr val="2E2A3A"/>
+                          </a:solidFill>
+                          <a:latin typeface="Alexandria" pitchFamily="34" charset="0"/>
+                          <a:ea typeface="Alexandria" pitchFamily="34" charset="-122"/>
+                          <a:cs typeface="Alexandria" pitchFamily="34" charset="-120"/>
+                        </a:rPr>
+                        <a:t>đối tượng</a:t>
                       </a:r>
                       <a:endParaRPr lang="en-US" sz="2400" dirty="0">
                         <a:latin typeface="Alexandria" charset="0"/>
@@ -8886,7 +8910,31 @@
                           <a:ea typeface="Alexandria" pitchFamily="34" charset="-122"/>
                           <a:cs typeface="Alexandria" pitchFamily="34" charset="-120"/>
                         </a:rPr>
-                        <a:t>Mô tả hành vi</a:t>
+                        <a:t>Mô tả</a:t>
+                      </a:r>
+                      <a:endParaRPr lang="en-US" sz="2400" dirty="0">
+                        <a:latin typeface="Alexandria" charset="0"/>
+                        <a:ea typeface="Alexandria" charset="0"/>
+                        <a:cs typeface="Alexandria" charset="0"/>
+                      </a:endParaRPr>
+                    </a:p>
+                    <a:p>
+                      <a:pPr indent="0" marL="0">
+                        <a:lnSpc>
+                          <a:spcPts val="3100"/>
+                        </a:lnSpc>
+                        <a:buNone/>
+                      </a:pPr>
+                      <a:r>
+                        <a:rPr lang="en-US" sz="2400" b="1" dirty="0">
+                          <a:solidFill>
+                            <a:srgbClr val="2E2A3A"/>
+                          </a:solidFill>
+                          <a:latin typeface="Alexandria" pitchFamily="34" charset="0"/>
+                          <a:ea typeface="Alexandria" pitchFamily="34" charset="-122"/>
+                          <a:cs typeface="Alexandria" pitchFamily="34" charset="-120"/>
+                        </a:rPr>
+                        <a:t>hành vi mua</a:t>
                       </a:r>
                       <a:endParaRPr lang="en-US" sz="2400" dirty="0">
                         <a:latin typeface="Alexandria" charset="0"/>
@@ -9172,7 +9220,31 @@
                           <a:ea typeface="Alexandria" pitchFamily="34" charset="-122"/>
                           <a:cs typeface="Alexandria" pitchFamily="34" charset="-120"/>
                         </a:rPr>
-                        <a:t>Giá, chất lượng</a:t>
+                        <a:t>Đánh giá giá,</a:t>
+                      </a:r>
+                      <a:endParaRPr lang="en-US" sz="2400" dirty="0">
+                        <a:latin typeface="Alexandria" charset="0"/>
+                        <a:ea typeface="Alexandria" charset="0"/>
+                        <a:cs typeface="Alexandria" charset="0"/>
+                      </a:endParaRPr>
+                    </a:p>
+                    <a:p>
+                      <a:pPr indent="0" marL="0">
+                        <a:lnSpc>
+                          <a:spcPts val="3100"/>
+                        </a:lnSpc>
+                        <a:buNone/>
+                      </a:pPr>
+                      <a:r>
+                        <a:rPr lang="en-US" sz="2400" b="1" dirty="0">
+                          <a:solidFill>
+                            <a:srgbClr val="2E2A3A"/>
+                          </a:solidFill>
+                          <a:latin typeface="Alexandria" pitchFamily="34" charset="0"/>
+                          <a:ea typeface="Alexandria" pitchFamily="34" charset="-122"/>
+                          <a:cs typeface="Alexandria" pitchFamily="34" charset="-120"/>
+                        </a:rPr>
+                        <a:t>chất lượng</a:t>
                       </a:r>
                       <a:endParaRPr lang="en-US" sz="2400" dirty="0">
                         <a:latin typeface="Alexandria" charset="0"/>
@@ -9972,10 +10044,10 @@
             <a:tbl>
               <a:tblPr/>
               <a:tblGrid>
-                <a:gridCol w="2321081"/>
-                <a:gridCol w="3763081"/>
-                <a:gridCol w="2115081"/>
-                <a:gridCol w="2864998"/>
+                <a:gridCol w="2884973"/>
+                <a:gridCol w="3102139"/>
+                <a:gridCol w="2538564"/>
+                <a:gridCol w="2538564"/>
               </a:tblGrid>
               <a:tr h="524256">
                 <a:tc>
@@ -15435,7 +15507,7 @@
         </p:nvSpPr>
         <p:spPr>
           <a:xfrm>
-            <a:off x="822960" y="2946400"/>
+            <a:off x="822960" y="2962910"/>
             <a:ext cx="182880" cy="182880"/>
           </a:xfrm>
           <a:prstGeom prst="ellipse">
@@ -15456,7 +15528,7 @@
         <p:spPr>
           <a:xfrm>
             <a:off x="1097280" y="2763520"/>
-            <a:ext cx="4709160" cy="944880"/>
+            <a:ext cx="4709160" cy="1010920"/>
           </a:xfrm>
           <a:prstGeom prst="rect">
             <a:avLst/>
@@ -15470,12 +15542,12 @@
           <a:p>
             <a:pPr algn="l" indent="0" marL="0">
               <a:lnSpc>
-                <a:spcPts val="3100"/>
+                <a:spcPts val="3400"/>
               </a:lnSpc>
               <a:buNone/>
             </a:pPr>
             <a:r>
-              <a:rPr lang="en-US" sz="2400" dirty="0">
+              <a:rPr lang="en-US" sz="2600" dirty="0">
                 <a:solidFill>
                   <a:srgbClr val="2E2A3A"/>
                 </a:solidFill>
@@ -15485,7 +15557,7 @@
               </a:rPr>
               <a:t>“Thu nhập hàng tháng của bạn là bao nhiêu?”</a:t>
             </a:r>
-            <a:endParaRPr lang="en-US" sz="2400" dirty="0"/>
+            <a:endParaRPr lang="en-US" sz="2600" dirty="0"/>
           </a:p>
         </p:txBody>
       </p:sp>
@@ -15583,7 +15655,7 @@
         </p:nvSpPr>
         <p:spPr>
           <a:xfrm>
-            <a:off x="6492240" y="2946400"/>
+            <a:off x="6492240" y="2962910"/>
             <a:ext cx="182880" cy="182880"/>
           </a:xfrm>
           <a:prstGeom prst="ellipse">
@@ -15604,7 +15676,7 @@
         <p:spPr>
           <a:xfrm>
             <a:off x="6766560" y="2763520"/>
-            <a:ext cx="4709160" cy="548640"/>
+            <a:ext cx="4709160" cy="581660"/>
           </a:xfrm>
           <a:prstGeom prst="rect">
             <a:avLst/>
@@ -15618,12 +15690,12 @@
           <a:p>
             <a:pPr algn="l" indent="0" marL="0">
               <a:lnSpc>
-                <a:spcPts val="3100"/>
+                <a:spcPts val="3400"/>
               </a:lnSpc>
               <a:buNone/>
             </a:pPr>
             <a:r>
-              <a:rPr lang="en-US" sz="2400" dirty="0">
+              <a:rPr lang="en-US" sz="2600" dirty="0">
                 <a:solidFill>
                   <a:srgbClr val="2E2A3A"/>
                 </a:solidFill>
@@ -15633,7 +15705,7 @@
               </a:rPr>
               <a:t>Dưới 3 triệu</a:t>
             </a:r>
-            <a:endParaRPr lang="en-US" sz="2400" dirty="0"/>
+            <a:endParaRPr lang="en-US" sz="2600" dirty="0"/>
           </a:p>
         </p:txBody>
       </p:sp>
@@ -15645,7 +15717,7 @@
         </p:nvSpPr>
         <p:spPr>
           <a:xfrm>
-            <a:off x="6492240" y="3632200"/>
+            <a:off x="6492240" y="3681730"/>
             <a:ext cx="182880" cy="182880"/>
           </a:xfrm>
           <a:prstGeom prst="ellipse">
@@ -15665,8 +15737,8 @@
         </p:nvSpPr>
         <p:spPr>
           <a:xfrm>
-            <a:off x="6766560" y="3449320"/>
-            <a:ext cx="4709160" cy="548640"/>
+            <a:off x="6766560" y="3482340"/>
+            <a:ext cx="4709160" cy="581660"/>
           </a:xfrm>
           <a:prstGeom prst="rect">
             <a:avLst/>
@@ -15680,12 +15752,12 @@
           <a:p>
             <a:pPr algn="l" indent="0" marL="0">
               <a:lnSpc>
-                <a:spcPts val="3100"/>
+                <a:spcPts val="3400"/>
               </a:lnSpc>
               <a:buNone/>
             </a:pPr>
             <a:r>
-              <a:rPr lang="en-US" sz="2400" dirty="0">
+              <a:rPr lang="en-US" sz="2600" dirty="0">
                 <a:solidFill>
                   <a:srgbClr val="2E2A3A"/>
                 </a:solidFill>
@@ -15695,7 +15767,7 @@
               </a:rPr>
               <a:t>Từ 3 đến dưới 5 triệu</a:t>
             </a:r>
-            <a:endParaRPr lang="en-US" sz="2400" dirty="0"/>
+            <a:endParaRPr lang="en-US" sz="2600" dirty="0"/>
           </a:p>
         </p:txBody>
       </p:sp>
@@ -15707,7 +15779,7 @@
         </p:nvSpPr>
         <p:spPr>
           <a:xfrm>
-            <a:off x="6492240" y="4318000"/>
+            <a:off x="6492240" y="4400550"/>
             <a:ext cx="182880" cy="182880"/>
           </a:xfrm>
           <a:prstGeom prst="ellipse">
@@ -15727,8 +15799,8 @@
         </p:nvSpPr>
         <p:spPr>
           <a:xfrm>
-            <a:off x="6766560" y="4135120"/>
-            <a:ext cx="4709160" cy="548640"/>
+            <a:off x="6766560" y="4201160"/>
+            <a:ext cx="4709160" cy="581660"/>
           </a:xfrm>
           <a:prstGeom prst="rect">
             <a:avLst/>
@@ -15742,12 +15814,12 @@
           <a:p>
             <a:pPr algn="l" indent="0" marL="0">
               <a:lnSpc>
-                <a:spcPts val="3100"/>
+                <a:spcPts val="3400"/>
               </a:lnSpc>
               <a:buNone/>
             </a:pPr>
             <a:r>
-              <a:rPr lang="en-US" sz="2400" dirty="0">
+              <a:rPr lang="en-US" sz="2600" dirty="0">
                 <a:solidFill>
                   <a:srgbClr val="2E2A3A"/>
                 </a:solidFill>
@@ -15757,7 +15829,7 @@
               </a:rPr>
               <a:t>Từ 5 đến dưới 7 triệu</a:t>
             </a:r>
-            <a:endParaRPr lang="en-US" sz="2400" dirty="0"/>
+            <a:endParaRPr lang="en-US" sz="2600" dirty="0"/>
           </a:p>
         </p:txBody>
       </p:sp>
@@ -15769,7 +15841,7 @@
         </p:nvSpPr>
         <p:spPr>
           <a:xfrm>
-            <a:off x="6492240" y="5003800"/>
+            <a:off x="6492240" y="5119370"/>
             <a:ext cx="182880" cy="182880"/>
           </a:xfrm>
           <a:prstGeom prst="ellipse">
@@ -15789,8 +15861,8 @@
         </p:nvSpPr>
         <p:spPr>
           <a:xfrm>
-            <a:off x="6766560" y="4820920"/>
-            <a:ext cx="4709160" cy="548640"/>
+            <a:off x="6766560" y="4919980"/>
+            <a:ext cx="4709160" cy="1010920"/>
           </a:xfrm>
           <a:prstGeom prst="rect">
             <a:avLst/>
@@ -15804,12 +15876,12 @@
           <a:p>
             <a:pPr algn="l" indent="0" marL="0">
               <a:lnSpc>
-                <a:spcPts val="3100"/>
+                <a:spcPts val="3400"/>
               </a:lnSpc>
               <a:buNone/>
             </a:pPr>
             <a:r>
-              <a:rPr lang="en-US" sz="2400" dirty="0">
+              <a:rPr lang="en-US" sz="2600" dirty="0">
                 <a:solidFill>
                   <a:srgbClr val="2E2A3A"/>
                 </a:solidFill>
@@ -15817,71 +15889,9 @@
                 <a:ea typeface="Alexandria" pitchFamily="34" charset="-122"/>
                 <a:cs typeface="Alexandria" pitchFamily="34" charset="-120"/>
               </a:rPr>
-              <a:t>Từ 7 triệu trở lên</a:t>
-            </a:r>
-            <a:endParaRPr lang="en-US" sz="2400" dirty="0"/>
-          </a:p>
-        </p:txBody>
-      </p:sp>
-      <p:sp>
-        <p:nvSpPr>
-          <p:cNvPr id="22" name="Dấu đầu dòng"/>
-          <p:cNvSpPr/>
-          <p:nvPr/>
-        </p:nvSpPr>
-        <p:spPr>
-          <a:xfrm>
-            <a:off x="6492240" y="5689600"/>
-            <a:ext cx="182880" cy="182880"/>
-          </a:xfrm>
-          <a:prstGeom prst="ellipse">
-            <a:avLst/>
-          </a:prstGeom>
-          <a:solidFill>
-            <a:srgbClr val="FF9259"/>
-          </a:solidFill>
-          <a:ln/>
-        </p:spPr>
-      </p:sp>
-      <p:sp>
-        <p:nvSpPr>
-          <p:cNvPr id="23" name="Text 21"/>
-          <p:cNvSpPr txBox="1"/>
-          <p:nvPr/>
-        </p:nvSpPr>
-        <p:spPr>
-          <a:xfrm>
-            <a:off x="6766560" y="5506720"/>
-            <a:ext cx="4709160" cy="548640"/>
-          </a:xfrm>
-          <a:prstGeom prst="rect">
-            <a:avLst/>
-          </a:prstGeom>
-          <a:noFill/>
-          <a:ln/>
-        </p:spPr>
-        <p:txBody>
-          <a:bodyPr wrap="square" lIns="76200" tIns="76200" rIns="76200" bIns="76200" rtlCol="0" anchor="t"/>
-          <a:lstStyle/>
-          <a:p>
-            <a:pPr algn="l" indent="0" marL="0">
-              <a:lnSpc>
-                <a:spcPts val="3100"/>
-              </a:lnSpc>
-              <a:buNone/>
-            </a:pPr>
-            <a:r>
-              <a:rPr lang="en-US" sz="2400" dirty="0">
-                <a:solidFill>
-                  <a:srgbClr val="2E2A3A"/>
-                </a:solidFill>
-                <a:latin typeface="Alexandria" pitchFamily="34" charset="0"/>
-                <a:ea typeface="Alexandria" pitchFamily="34" charset="-122"/>
-                <a:cs typeface="Alexandria" pitchFamily="34" charset="-120"/>
-              </a:rPr>
-              <a:t>Không muốn trả lời</a:t>
-            </a:r>
-            <a:endParaRPr lang="en-US" sz="2400" dirty="0"/>
+              <a:t>Từ 7 triệu trở lên · Không muốn trả lời</a:t>
+            </a:r>
+            <a:endParaRPr lang="en-US" sz="2600" dirty="0"/>
           </a:p>
         </p:txBody>
       </p:sp>
@@ -22607,7 +22617,7 @@
                 <a:ea typeface="Alexandria" pitchFamily="34" charset="-122"/>
                 <a:cs typeface="Alexandria" pitchFamily="34" charset="-120"/>
               </a:rPr>
-              <a:t>Bỏ qua câu không liên quan</a:t>
+              <a:t>Bỏ câu không liên quan</a:t>
             </a:r>
             <a:endParaRPr lang="en-US" sz="2500" dirty="0"/>
           </a:p>

--- a/mkt1107/output/MKT1107_W10_slides.pptx
+++ b/mkt1107/output/MKT1107_W10_slides.pptx
@@ -152,19 +152,19 @@
   <p:extLst>
     <p:ext uri="{521415D9-36F7-43E2-AB2F-B90AF26B5E84}">
       <p14:sectionLst xmlns:p14="http://schemas.microsoft.com/office/powerpoint/2010/main">
-        <p14:section name="Mở đầu" id="{764eeafb-d06c-9c56-9f03-32639a289f98}">
+        <p14:section name="Mở đầu" id="{67a482f6-6aec-eb75-9424-e2051251a5d6}">
           <p14:sldIdLst>
             <p14:sldId id="256"/>
           </p14:sldIdLst>
         </p14:section>
-        <p14:section name="S1 · Khởi động: kiểm tra bài tập Buổi 9" id="{22b11b09-5024-cad4-b9a6-334e954ec82f}">
+        <p14:section name="S1 · Khởi động: kiểm tra bài tập Buổi 9" id="{e7333c34-9200-d5fe-5ba9-3bbd5d318839}">
           <p14:sldIdLst>
             <p14:sldId id="257"/>
             <p14:sldId id="258"/>
             <p14:sldId id="259"/>
           </p14:sldIdLst>
         </p14:section>
-        <p14:section name="S2 · Bảng câu hỏi là gì, cần gì, đi qua mấy bước" id="{cea1ad79-9cc4-11f7-aa14-093612986998}">
+        <p14:section name="S2 · Bảng câu hỏi là gì, cần gì, đi qua mấy bước" id="{80889c2b-a827-85cf-aafd-5907c32bab9a}">
           <p14:sldIdLst>
             <p14:sldId id="260"/>
             <p14:sldId id="261"/>
@@ -174,7 +174,7 @@
             <p14:sldId id="265"/>
           </p14:sldIdLst>
         </p14:section>
-        <p14:section name="S3 · Từ mục tiêu đến câu hỏi: bước 1–4" id="{4823e7b3-2d79-655e-01a9-5506e1b2796d}">
+        <p14:section name="S3 · Từ mục tiêu đến câu hỏi: bước 1–4" id="{ca7324a5-2e04-bad5-a572-dbcc78bc00a4}">
           <p14:sldIdLst>
             <p14:sldId id="266"/>
             <p14:sldId id="267"/>
@@ -189,14 +189,14 @@
             <p14:sldId id="276"/>
           </p14:sldIdLst>
         </p14:section>
-        <p14:section name="S4 · Kiểm tra nhanh" id="{91e4f924-31a2-ac97-2361-74b31f3d4a1c}">
+        <p14:section name="S4 · Kiểm tra nhanh" id="{11ece7f0-41b7-90cd-65f8-eefe5bdf135f}">
           <p14:sldIdLst>
             <p14:sldId id="277"/>
             <p14:sldId id="278"/>
             <p14:sldId id="279"/>
           </p14:sldIdLst>
         </p14:section>
-        <p14:section name="S5 · Cấu trúc 3 phần và hình thức trực tuyến" id="{bd6e8f38-277d-d16a-9aa5-909bdaa4266d}">
+        <p14:section name="S5 · Cấu trúc 3 phần và hình thức trực tuyến" id="{0bafabb1-d4fc-7c05-c72f-35e2ab3df27d}">
           <p14:sldIdLst>
             <p14:sldId id="280"/>
             <p14:sldId id="281"/>
@@ -207,7 +207,7 @@
             <p14:sldId id="286"/>
           </p14:sldIdLst>
         </p14:section>
-        <p14:section name="S6 · Năm lỗi đặt câu hỏi: bắt lỗi nhanh" id="{76a6e495-a56b-772d-a547-db2a8eb98d10}">
+        <p14:section name="S6 · Năm lỗi đặt câu hỏi: bắt lỗi nhanh" id="{7a5e86aa-ca4c-46b2-9d16-db2e990ebb4f}">
           <p14:sldIdLst>
             <p14:sldId id="287"/>
             <p14:sldId id="288"/>
@@ -220,14 +220,14 @@
             <p14:sldId id="295"/>
           </p14:sldIdLst>
         </p14:section>
-        <p14:section name="S8 · Thực hành nhóm: Xưởng bảng hỏi" id="{6c8ec69d-e2d4-37a6-86d3-3cab7df04a7f}">
+        <p14:section name="S8 · Thực hành nhóm: Xưởng bảng hỏi" id="{f8b908b5-d7fa-ca42-4a98-b955fb15f1ec}">
           <p14:sldIdLst>
             <p14:sldId id="296"/>
             <p14:sldId id="297"/>
             <p14:sldId id="298"/>
           </p14:sldIdLst>
         </p14:section>
-        <p14:section name="S9 · Kết buổi" id="{b2c759eb-e36a-4d89-ac93-af7e50986dea}">
+        <p14:section name="S9 · Kết buổi" id="{015de706-8d21-6195-6792-cae7ec89f3c8}">
           <p14:sldIdLst>
             <p14:sldId id="299"/>
             <p14:sldId id="300"/>
@@ -822,7 +822,8 @@
           <a:p>
             <a:r>
               <a:rPr lang="en-US" dirty="0"/>
-              <a:t>Phân đoạn 23 phút, phần nội dung dài nhất trước giải lao: bước 1 bảng ánh xạ (khoảng 9 phút), bước 2 dạng phỏng vấn (khoảng 4 phút), bước 3 đánh giá nội dung câu hỏi và câu nhạy cảm (khoảng 5 phút), bước 4 hình thức trả lời (khoảng 5 phút, lướt — Buổi 11 đi sâu).
+              <a:t>Thời gian: phút 22–45 của buổi học.
+Phân đoạn 23 phút, phần nội dung dài nhất trước giải lao: bước 1 bảng ánh xạ (khoảng 9 phút), bước 2 dạng phỏng vấn (khoảng 4 phút), bước 3 đánh giá nội dung câu hỏi và câu nhạy cảm (khoảng 5 phút), bước 4 hình thức trả lời (khoảng 5 phút, lướt — Buổi 11 đi sâu).
 Đề nghị các nhóm mở bảng thang đo của mình để đối chiếu với ví dụ trong lúc nghe.
 Trước khi chuyển sang slide đầu tiên của phân đoạn, nói một câu nối với phần vừa học để lớp thấy mạch bài, và nhắc các nhóm đối chiếu ngay với bản nháp bảng hỏi hoặc dàn bài của mình.</a:t>
             </a:r>
@@ -1644,7 +1645,8 @@
           <a:p>
             <a:r>
               <a:rPr lang="en-US" dirty="0"/>
-              <a:t>Phân đoạn mở đầu 10 phút: kiểm tra bảng thang đo (định lượng) và khung chủ đề (định tính) — bài tập Buổi 9 — rồi mở bài bằng câu hỏi “hỏi sai thì sao?”.
+              <a:t>Thời gian: phút 0–10 của buổi học.
+Phân đoạn mở đầu 10 phút: kiểm tra bảng thang đo (định lượng) và khung chủ đề (định tính) — bài tập Buổi 9 — rồi mở bài bằng câu hỏi “hỏi sai thì sao?”.
 Mời trước hai nhóm, một định lượng và một định tính, mỗi nhóm chiếu bảng của mình 1 phút. Các nhóm khác mở bảng của mình ra đối chiếu với ba câu kiểm ở slide sau.
 Nếu nhiều nhóm chưa làm bài Buổi 9: ghi lại tên nhóm, sẽ dùng phương án dự phòng trong phần thực hành (lập bảng ánh xạ từ mô hình trong đề cương).</a:t>
             </a:r>
@@ -1919,7 +1921,8 @@
           <a:p>
             <a:r>
               <a:rPr lang="en-US" dirty="0"/>
-              <a:t>Phân đoạn 5 phút kiểm tra xem lớp đã dùng được bảng ánh xạ chưa, ngay trước giải lao.
+              <a:t>Thời gian: phút 45–50 của buổi học.
+Phân đoạn 5 phút kiểm tra xem lớp đã dùng được bảng ánh xạ chưa, ngay trước giải lao.
 Cách làm: chiếu bảng ánh xạ rút gọn ở slide sau; làm theo cặp 30 giây; chỉ định 2 bạn trả lời (không chờ xung phong) để kiểm tra đúng người chưa chắc.
 Trước khi chuyển sang slide đầu tiên của phân đoạn, nói một câu nối với phần vừa học để lớp thấy mạch bài, và nhắc các nhóm đối chiếu ngay với bản nháp bảng hỏi hoặc dàn bài của mình.</a:t>
             </a:r>
@@ -2009,7 +2012,8 @@
           <a:p>
             <a:r>
               <a:rPr lang="en-US" dirty="0"/>
-              <a:t>Bảng ánh xạ rút gọn của đề tài giả định “trà sữa gần trường” — 3 mục tiêu, 6 câu hỏi. M1: mô tả tần suất và mức chi cho trà sữa — C1 số lần mua trong 7 ngày qua, C2 số tiền trung bình mỗi lần. M2: đo mức hài lòng với cửa hàng X — C3 đến C5 hài lòng về vị, giá, phục vụ (Likert 5 điểm). M3: so sánh mức hài lòng giữa sinh viên năm 1 và các năm khác — chưa có câu. Và C6 “Bạn thích nghe thể loại nhạc nào khi uống trà sữa?” không thuộc mục tiêu nào.
+              <a:t>Thời gian: 30 giây theo cặp.
+Bảng ánh xạ rút gọn của đề tài giả định “trà sữa gần trường” — 3 mục tiêu, 6 câu hỏi. M1: mô tả tần suất và mức chi cho trà sữa — C1 số lần mua trong 7 ngày qua, C2 số tiền trung bình mỗi lần. M2: đo mức hài lòng với cửa hàng X — C3 đến C5 hài lòng về vị, giá, phục vụ (Likert 5 điểm). M3: so sánh mức hài lòng giữa sinh viên năm 1 và các năm khác — chưa có câu. Và C6 “Bạn thích nghe thể loại nhạc nào khi uống trà sữa?” không thuộc mục tiêu nào.
 Cho cặp 30 giây, rồi chỉ định 2 bạn trả lời hai câu hỏi: (1) Câu nào thừa? (2) Mục tiêu nào thiếu câu — cần thêm câu gì?
 Đáp án mong đợi: (1) C6 thừa → cắt, trừ khi nhóm bổ sung một mục tiêu cần nó và có lý do. (2) M3 thiếu câu năm học — đặt ở phần thông tin cá nhân cuối bảng; kỹ thuật phân tích: kiểm định khác biệt.
 Câu chốt: “Bước 1 mất 10 phút, nhưng tiết kiệm cho nhóm một lần khảo sát lại.”</a:t>
@@ -2100,7 +2104,8 @@
           <a:p>
             <a:r>
               <a:rPr lang="en-US" dirty="0"/>
-              <a:t>Giải lao 15 phút (phút 50–65). Điền giờ quay lại cụ thể vào dấu “…” trước khi chiếu.
+              <a:t>Thời gian: giải lao 15 phút.
+Giải lao 15 phút (phút 50–65). Điền giờ quay lại cụ thể vào dấu “…” trước khi chiếu.
 Nhắc lớp trong giờ nghỉ mở sẵn bảng thang đo (định lượng) hoặc khung chủ đề (định tính) của nhóm, và đề cương — sau giải lao là cấu trúc bảng hỏi rồi đến phần bắt lỗi, các nhóm sẽ cần đối chiếu ngay.
 Nếu có thể, trong giờ nghỉ mở sẵn một Google Forms mẫu trên máy chiếu để dùng ở slide Google Forms.</a:t>
             </a:r>
@@ -2190,7 +2195,8 @@
           <a:p>
             <a:r>
               <a:rPr lang="en-US" dirty="0"/>
-              <a:t>Phân đoạn 13 phút: bước 6 — cấu trúc ba phần của bảng hỏi (khoảng 8 phút) và bước 7 — hình thức bảng hỏi trực tuyến trên Google Forms (khoảng 5 phút).
+              <a:t>Thời gian: phút 65–78 của buổi học.
+Phân đoạn 13 phút: bước 6 — cấu trúc ba phần của bảng hỏi (khoảng 8 phút) và bước 7 — hình thức bảng hỏi trực tuyến trên Google Forms (khoảng 5 phút).
 Nhóm định tính ghi lại cấu trúc dàn bài tương ứng: mở đầu – câu khởi động – câu hỏi chính theo chủ đề – kết thúc.
 Trước khi chuyển sang slide đầu tiên của phân đoạn, nói một câu nối với phần vừa học để lớp thấy mạch bài, và nhắc các nhóm đối chiếu ngay với bản nháp bảng hỏi hoặc dàn bài của mình.</a:t>
             </a:r>
@@ -2922,7 +2928,8 @@
           <a:p>
             <a:r>
               <a:rPr lang="en-US" dirty="0"/>
-              <a:t>Hoạt động 15 phút theo kiểu Think-Pair-Share rút gọn với chỉ định phát biểu. Sáu câu sai, mỗi câu khoảng 2 phút: chiếu câu sai → cặp 20 giây → chỉ định 1 cặp gọi tên lỗi và đề xuất sửa → chiếu câu sửa và nói một câu nguyên tắc. Phút 91–93 chốt.
+              <a:t>Thời gian: phút 78–93 của buổi học.
+Hoạt động 15 phút theo kiểu Think-Pair-Share rút gọn với chỉ định phát biểu. Sáu câu sai, mỗi câu khoảng 2 phút: chiếu câu sai → cặp 20 giây → chỉ định 1 cặp gọi tên lỗi và đề xuất sửa → chiếu câu sửa và nói một câu nguyên tắc. Phút 91–93 chốt.
 Nếu chạy quá giờ: chỉ chữa câu 1, 2, 5, 6; câu 3–4 để sinh viên tự đọc đáp án trên slide.
 Lưu ý cho giảng viên: kịch bản và đáp án đầy đủ trong phiếu hoạt động “Bắt lỗi nhanh” của Buổi 10.</a:t>
             </a:r>
@@ -3841,7 +3848,8 @@
           <a:p>
             <a:r>
               <a:rPr lang="en-US" dirty="0"/>
-              <a:t>Phân đoạn thực hành 45 phút — kỹ thuật làm việc nhóm theo sản phẩm và đánh giá đồng đẳng có checklist. Ghép cặp nhóm cho chặng săn lỗi: định lượng với định lượng, định tính với định tính nếu được; công bố cặp ngay từ đầu.
+              <a:t>Thời gian: phút 98–143 của buổi học.
+Phân đoạn thực hành 45 phút — kỹ thuật làm việc nhóm theo sản phẩm và đánh giá đồng đẳng có checklist. Ghép cặp nhóm cho chặng săn lỗi: định lượng với định lượng, định tính với định tính nếu được; công bố cặp ngay từ đầu.
 Sinh viên cần máy tính, đề cương và bảng thang đo / khung chủ đề, tài khoản Google nếu dựng Forms.
 Lưu ý cho giảng viên: kịch bản, Bảng 1–3, Khung A/B và checklist săn lỗi nằm trong phiếu hoạt động “Xưởng bảng hỏi” của Buổi 10.</a:t>
             </a:r>
@@ -3931,7 +3939,9 @@
           <a:p>
             <a:r>
               <a:rPr lang="en-US" dirty="0"/>
-              <a:t>Để slide này trên màn hình trong chặng 1–2. Kịch bản mở đầu: “45 phút tới, mỗi nhóm sẽ ra về với một bản nháp đầy đủ. Bắt đầu bằng 8 phút lập bảng ánh xạ — đừng mở Google Forms trước. Sau đó 22 phút viết đủ ba phần; nhóm định lượng nào nhanh thì dựng luôn trên Google Forms. Phút thứ 30, tôi sẽ báo đổi bài: mỗi nhóm đọc bản nháp của nhóm bên cạnh như một người trả lời và ghi lỗi theo checklist — không sửa hộ. 5 phút cuối nhóm sửa lại.”
+              <a:t>Thời gian: 45 phút.
+Phân bổ thời gian — chặng 1: 8 phút; chặng 2: 22 phút; chặng 3: 10 phút; chặng 4: 5 phút.
+Để slide này trên màn hình trong chặng 1–2. Kịch bản mở đầu: “45 phút tới, mỗi nhóm sẽ ra về với một bản nháp đầy đủ. Bắt đầu bằng 8 phút lập bảng ánh xạ — đừng mở Google Forms trước. Sau đó 22 phút viết đủ ba phần; nhóm định lượng nào nhanh thì dựng luôn trên Google Forms. Phút thứ 30, tôi sẽ báo đổi bài: mỗi nhóm đọc bản nháp của nhóm bên cạnh như một người trả lời và ghi lỗi theo checklist — không sửa hộ. 5 phút cuối nhóm sửa lại.”
 Mốc: 99–106 chặng 1, kiểm tra mỗi nhóm có ít nhất một dòng “kỹ thuật phân tích” đúng với cấp thang đo; phút 106 báo “bây giờ mới mở Google Forms”. 106–128 chặng 2: kiểm tra câu gạn lọc, vị trí nhân khẩu học, câu kép trong thang đo dịch từ tiếng Anh; phút 127 báo còn 1 phút. 128–138 chặng 3 (chiếu slide checklist). 138–143 chặng 4: sửa nhanh, chọn “lỗi đắt giá nhất”.
 Xử lý: nhóm chưa có bảng thang đo → lập bảng ánh xạ từ mô hình, viết trước mở đầu, gạn lọc, thông tin cá nhân. Bảng hỏi quá dài (hơn 35 câu) → cắt câu “hỏi cho biết”. Nhóm hỏi email “để bốc thăm quà” → tách sang form riêng. Dàn bài ĐT toàn câu Có/Không → đổi thành “Bạn có thể kể về…?”.</a:t>
             </a:r>
@@ -4021,7 +4031,8 @@
           <a:p>
             <a:r>
               <a:rPr lang="en-US" dirty="0"/>
-              <a:t>Chiếu slide này trong chặng 3 (phút 128–138). Mỗi nhóm đổi bản nháp với nhóm bên cạnh theo cặp đã công bố.
+              <a:t>Thời gian: 10 phút.
+Chiếu slide này trong chặng 3 (phút 128–138). Mỗi nhóm đổi bản nháp với nhóm bên cạnh theo cặp đã công bố.
 Đọc bản nháp của nhóm bạn như một người trả lời, đối chiếu checklist: mọi mục tiêu có câu hỏi, không câu thừa; câu gạn lọc ở đầu, người không đạt được cảm ơn và dừng; thông tin cá nhân và câu nhạy cảm ở cuối, có “Không muốn trả lời”; không có câu kép (soát chữ “và”, “hoặc”), câu dẫn dắt, từ mơ hồ, phủ định kép, bắt ước đoán; thang cân bằng, khoảng lựa chọn không chồng lấn, không bỏ sót, có “Khác: ____” khi cần; số bậc xếp hạng bằng số mục, câu mở không quá 1–2; ước tính dưới 10 phút; không thu email hay họ tên. Nhóm định tính: câu hỏi chính là câu mở, mỗi câu có câu gợi mở.
 Ghi lỗi vào Bảng 2 của nhóm bạn — số câu, lỗi gì, gợi ý sửa. Không sửa hộ. Giảng viên đi xem Bảng 2 có ghi đủ cụ thể không.</a:t>
             </a:r>
@@ -4111,7 +4122,8 @@
           <a:p>
             <a:r>
               <a:rPr lang="en-US" dirty="0"/>
-              <a:t>Phân đoạn kết buổi 5 phút, thêm 2 phút dự phòng.
+              <a:t>Thời gian: phút 143–148 của buổi học.
+Phân đoạn kết buổi 5 phút, thêm 2 phút dự phòng.
 Mời 2 nhóm, mỗi nhóm 30 giây: “Lỗi đắt giá nhất mà nhóm bạn tìm ra cho nhóm mình là gì?” Ghi lên bảng; gom thành 2–3 lỗi chung để mở đầu Buổi 11.
 Sau đó giao bài tập ở slide sau.
 Trước khi chuyển sang slide đầu tiên của phân đoạn, nói một câu nối với phần vừa học để lớp thấy mạch bài, và nhắc các nhóm đối chiếu ngay với bản nháp bảng hỏi hoặc dàn bài của mình.</a:t>
@@ -4383,7 +4395,8 @@
           <a:p>
             <a:r>
               <a:rPr lang="en-US" dirty="0"/>
-              <a:t>Phân đoạn 12 phút: mục tiêu buổi học, vai trò bảng câu hỏi (8.1), hai yêu cầu cơ bản, “nguyên tắc 5 phút” và tổng quan quy trình 8 bước.
+              <a:t>Thời gian: phút 10–22 của buổi học.
+Phân đoạn 12 phút: mục tiêu buổi học, vai trò bảng câu hỏi (8.1), hai yêu cầu cơ bản, “nguyên tắc 5 phút” và tổng quan quy trình 8 bước.
 Nói nhanh ở mục tiêu và vai trò; dừng lâu hơn ở nguyên tắc 5 phút vì đây là chỗ sinh viên hay vi phạm nhất — bảng hỏi quá dài.
 Trước khi chuyển sang slide đầu tiên của phân đoạn, nói một câu nối với phần vừa học để lớp thấy mạch bài, và nhắc các nhóm đối chiếu ngay với bản nháp bảng hỏi hoặc dàn bài của mình.</a:t>
             </a:r>
@@ -4890,8 +4903,8 @@
         </p:nvSpPr>
         <p:spPr>
           <a:xfrm>
-            <a:off x="3840480" y="2103120"/>
-            <a:ext cx="6766560" cy="2194560"/>
+            <a:off x="3840480" y="2240280"/>
+            <a:ext cx="6766560" cy="2377440"/>
           </a:xfrm>
           <a:prstGeom prst="rect">
             <a:avLst/>
@@ -7170,49 +7183,7 @@
       </p:sp>
       <p:sp>
         <p:nvSpPr>
-          <p:cNvPr id="8" name="Text 6"/>
-          <p:cNvSpPr txBox="1"/>
-          <p:nvPr/>
-        </p:nvSpPr>
-        <p:spPr>
-          <a:xfrm>
-            <a:off x="3840480" y="1417320"/>
-            <a:ext cx="6766560" cy="594360"/>
-          </a:xfrm>
-          <a:prstGeom prst="rect">
-            <a:avLst/>
-          </a:prstGeom>
-          <a:noFill/>
-          <a:ln/>
-        </p:spPr>
-        <p:txBody>
-          <a:bodyPr wrap="square" lIns="76200" tIns="76200" rIns="76200" bIns="76200" rtlCol="0" anchor="t"/>
-          <a:lstStyle/>
-          <a:p>
-            <a:pPr algn="l" indent="0" marL="0">
-              <a:lnSpc>
-                <a:spcPts val="3600"/>
-              </a:lnSpc>
-              <a:buNone/>
-            </a:pPr>
-            <a:r>
-              <a:rPr lang="en-US" sz="2800" b="1" dirty="0">
-                <a:solidFill>
-                  <a:srgbClr val="962B7C"/>
-                </a:solidFill>
-                <a:latin typeface="Alexandria" pitchFamily="34" charset="0"/>
-                <a:ea typeface="Alexandria" pitchFamily="34" charset="-122"/>
-                <a:cs typeface="Alexandria" pitchFamily="34" charset="-120"/>
-              </a:rPr>
-              <a:t>22–45 phút</a:t>
-            </a:r>
-            <a:endParaRPr lang="en-US" sz="2800" dirty="0"/>
-          </a:p>
-        </p:txBody>
-      </p:sp>
-      <p:sp>
-        <p:nvSpPr>
-          <p:cNvPr id="9" name="Text 0"/>
+          <p:cNvPr id="8" name="Text 0"/>
           <p:cNvSpPr/>
           <p:nvPr>
             <p:ph idx="100" type="title" hasCustomPrompt="1"/>
@@ -7220,8 +7191,8 @@
         </p:nvSpPr>
         <p:spPr>
           <a:xfrm>
-            <a:off x="3840480" y="2103120"/>
-            <a:ext cx="6766560" cy="2194560"/>
+            <a:off x="3840480" y="2240280"/>
+            <a:ext cx="6766560" cy="2377440"/>
           </a:xfrm>
           <a:prstGeom prst="rect">
             <a:avLst/>
@@ -7230,7 +7201,7 @@
           <a:ln/>
         </p:spPr>
         <p:txBody>
-          <a:bodyPr wrap="square" lIns="76200" tIns="76200" rIns="76200" bIns="76200" rtlCol="0" anchor="t"/>
+          <a:bodyPr wrap="square" lIns="76200" tIns="76200" rIns="76200" bIns="76200" rtlCol="0" anchor="ctr"/>
           <a:lstStyle/>
           <a:p>
             <a:pPr algn="l" indent="0" marL="0">
@@ -16109,49 +16080,7 @@
       </p:sp>
       <p:sp>
         <p:nvSpPr>
-          <p:cNvPr id="8" name="Text 6"/>
-          <p:cNvSpPr txBox="1"/>
-          <p:nvPr/>
-        </p:nvSpPr>
-        <p:spPr>
-          <a:xfrm>
-            <a:off x="3840480" y="1417320"/>
-            <a:ext cx="6766560" cy="594360"/>
-          </a:xfrm>
-          <a:prstGeom prst="rect">
-            <a:avLst/>
-          </a:prstGeom>
-          <a:noFill/>
-          <a:ln/>
-        </p:spPr>
-        <p:txBody>
-          <a:bodyPr wrap="square" lIns="76200" tIns="76200" rIns="76200" bIns="76200" rtlCol="0" anchor="t"/>
-          <a:lstStyle/>
-          <a:p>
-            <a:pPr algn="l" indent="0" marL="0">
-              <a:lnSpc>
-                <a:spcPts val="3600"/>
-              </a:lnSpc>
-              <a:buNone/>
-            </a:pPr>
-            <a:r>
-              <a:rPr lang="en-US" sz="2800" b="1" dirty="0">
-                <a:solidFill>
-                  <a:srgbClr val="962B7C"/>
-                </a:solidFill>
-                <a:latin typeface="Alexandria" pitchFamily="34" charset="0"/>
-                <a:ea typeface="Alexandria" pitchFamily="34" charset="-122"/>
-                <a:cs typeface="Alexandria" pitchFamily="34" charset="-120"/>
-              </a:rPr>
-              <a:t>0–10 phút</a:t>
-            </a:r>
-            <a:endParaRPr lang="en-US" sz="2800" dirty="0"/>
-          </a:p>
-        </p:txBody>
-      </p:sp>
-      <p:sp>
-        <p:nvSpPr>
-          <p:cNvPr id="9" name="Text 0"/>
+          <p:cNvPr id="8" name="Text 0"/>
           <p:cNvSpPr/>
           <p:nvPr>
             <p:ph idx="100" type="title" hasCustomPrompt="1"/>
@@ -16159,8 +16088,8 @@
         </p:nvSpPr>
         <p:spPr>
           <a:xfrm>
-            <a:off x="3840480" y="2103120"/>
-            <a:ext cx="6766560" cy="2194560"/>
+            <a:off x="3840480" y="2240280"/>
+            <a:ext cx="6766560" cy="2377440"/>
           </a:xfrm>
           <a:prstGeom prst="rect">
             <a:avLst/>
@@ -16169,7 +16098,7 @@
           <a:ln/>
         </p:spPr>
         <p:txBody>
-          <a:bodyPr wrap="square" lIns="76200" tIns="76200" rIns="76200" bIns="76200" rtlCol="0" anchor="t"/>
+          <a:bodyPr wrap="square" lIns="76200" tIns="76200" rIns="76200" bIns="76200" rtlCol="0" anchor="ctr"/>
           <a:lstStyle/>
           <a:p>
             <a:pPr algn="l" indent="0" marL="0">
@@ -17931,49 +17860,7 @@
       </p:sp>
       <p:sp>
         <p:nvSpPr>
-          <p:cNvPr id="8" name="Text 6"/>
-          <p:cNvSpPr txBox="1"/>
-          <p:nvPr/>
-        </p:nvSpPr>
-        <p:spPr>
-          <a:xfrm>
-            <a:off x="3840480" y="1417320"/>
-            <a:ext cx="6766560" cy="594360"/>
-          </a:xfrm>
-          <a:prstGeom prst="rect">
-            <a:avLst/>
-          </a:prstGeom>
-          <a:noFill/>
-          <a:ln/>
-        </p:spPr>
-        <p:txBody>
-          <a:bodyPr wrap="square" lIns="76200" tIns="76200" rIns="76200" bIns="76200" rtlCol="0" anchor="t"/>
-          <a:lstStyle/>
-          <a:p>
-            <a:pPr algn="l" indent="0" marL="0">
-              <a:lnSpc>
-                <a:spcPts val="3600"/>
-              </a:lnSpc>
-              <a:buNone/>
-            </a:pPr>
-            <a:r>
-              <a:rPr lang="en-US" sz="2800" b="1" dirty="0">
-                <a:solidFill>
-                  <a:srgbClr val="962B7C"/>
-                </a:solidFill>
-                <a:latin typeface="Alexandria" pitchFamily="34" charset="0"/>
-                <a:ea typeface="Alexandria" pitchFamily="34" charset="-122"/>
-                <a:cs typeface="Alexandria" pitchFamily="34" charset="-120"/>
-              </a:rPr>
-              <a:t>45–50 phút</a:t>
-            </a:r>
-            <a:endParaRPr lang="en-US" sz="2800" dirty="0"/>
-          </a:p>
-        </p:txBody>
-      </p:sp>
-      <p:sp>
-        <p:nvSpPr>
-          <p:cNvPr id="9" name="Text 0"/>
+          <p:cNvPr id="8" name="Text 0"/>
           <p:cNvSpPr/>
           <p:nvPr>
             <p:ph idx="100" type="title" hasCustomPrompt="1"/>
@@ -17981,8 +17868,8 @@
         </p:nvSpPr>
         <p:spPr>
           <a:xfrm>
-            <a:off x="3840480" y="2103120"/>
-            <a:ext cx="6766560" cy="2194560"/>
+            <a:off x="3840480" y="2240280"/>
+            <a:ext cx="6766560" cy="2377440"/>
           </a:xfrm>
           <a:prstGeom prst="rect">
             <a:avLst/>
@@ -17991,7 +17878,7 @@
           <a:ln/>
         </p:spPr>
         <p:txBody>
-          <a:bodyPr wrap="square" lIns="76200" tIns="76200" rIns="76200" bIns="76200" rtlCol="0" anchor="t"/>
+          <a:bodyPr wrap="square" lIns="76200" tIns="76200" rIns="76200" bIns="76200" rtlCol="0" anchor="ctr"/>
           <a:lstStyle/>
           <a:p>
             <a:pPr algn="l" indent="0" marL="0">
@@ -19053,7 +18940,7 @@
                 <a:ea typeface="Alexandria" pitchFamily="34" charset="-122"/>
                 <a:cs typeface="Alexandria" pitchFamily="34" charset="-120"/>
               </a:rPr>
-              <a:t>Cặp 30 giây: câu nào thừa? mục tiêu nào thiếu?</a:t>
+              <a:t>Cặp đôi: câu nào thừa? mục tiêu nào thiếu?</a:t>
             </a:r>
             <a:endParaRPr lang="en-US" sz="2600" dirty="0"/>
           </a:p>
@@ -19265,7 +19152,7 @@
                 <a:ea typeface="Alexandria" pitchFamily="34" charset="-122"/>
                 <a:cs typeface="Alexandria" pitchFamily="34" charset="-120"/>
               </a:rPr>
-              <a:t>15'</a:t>
+              <a:t>Nghỉ</a:t>
             </a:r>
             <a:endParaRPr lang="en-US" sz="9600" dirty="0"/>
           </a:p>
@@ -19307,7 +19194,7 @@
                 <a:ea typeface="Alexandria" pitchFamily="34" charset="-122"/>
                 <a:cs typeface="Alexandria" pitchFamily="34" charset="-120"/>
               </a:rPr>
-              <a:t>Giải lao 15 phút</a:t>
+              <a:t>Giải lao</a:t>
             </a:r>
             <a:endParaRPr lang="en-US" sz="4800" dirty="0"/>
           </a:p>
@@ -19569,49 +19456,7 @@
       </p:sp>
       <p:sp>
         <p:nvSpPr>
-          <p:cNvPr id="8" name="Text 6"/>
-          <p:cNvSpPr txBox="1"/>
-          <p:nvPr/>
-        </p:nvSpPr>
-        <p:spPr>
-          <a:xfrm>
-            <a:off x="3840480" y="1417320"/>
-            <a:ext cx="6766560" cy="594360"/>
-          </a:xfrm>
-          <a:prstGeom prst="rect">
-            <a:avLst/>
-          </a:prstGeom>
-          <a:noFill/>
-          <a:ln/>
-        </p:spPr>
-        <p:txBody>
-          <a:bodyPr wrap="square" lIns="76200" tIns="76200" rIns="76200" bIns="76200" rtlCol="0" anchor="t"/>
-          <a:lstStyle/>
-          <a:p>
-            <a:pPr algn="l" indent="0" marL="0">
-              <a:lnSpc>
-                <a:spcPts val="3600"/>
-              </a:lnSpc>
-              <a:buNone/>
-            </a:pPr>
-            <a:r>
-              <a:rPr lang="en-US" sz="2800" b="1" dirty="0">
-                <a:solidFill>
-                  <a:srgbClr val="962B7C"/>
-                </a:solidFill>
-                <a:latin typeface="Alexandria" pitchFamily="34" charset="0"/>
-                <a:ea typeface="Alexandria" pitchFamily="34" charset="-122"/>
-                <a:cs typeface="Alexandria" pitchFamily="34" charset="-120"/>
-              </a:rPr>
-              <a:t>65–78 phút</a:t>
-            </a:r>
-            <a:endParaRPr lang="en-US" sz="2800" dirty="0"/>
-          </a:p>
-        </p:txBody>
-      </p:sp>
-      <p:sp>
-        <p:nvSpPr>
-          <p:cNvPr id="9" name="Text 0"/>
+          <p:cNvPr id="8" name="Text 0"/>
           <p:cNvSpPr/>
           <p:nvPr>
             <p:ph idx="100" type="title" hasCustomPrompt="1"/>
@@ -19619,8 +19464,8 @@
         </p:nvSpPr>
         <p:spPr>
           <a:xfrm>
-            <a:off x="3840480" y="2103120"/>
-            <a:ext cx="6766560" cy="2194560"/>
+            <a:off x="3840480" y="2240280"/>
+            <a:ext cx="6766560" cy="2377440"/>
           </a:xfrm>
           <a:prstGeom prst="rect">
             <a:avLst/>
@@ -19629,7 +19474,7 @@
           <a:ln/>
         </p:spPr>
         <p:txBody>
-          <a:bodyPr wrap="square" lIns="76200" tIns="76200" rIns="76200" bIns="76200" rtlCol="0" anchor="t"/>
+          <a:bodyPr wrap="square" lIns="76200" tIns="76200" rIns="76200" bIns="76200" rtlCol="0" anchor="ctr"/>
           <a:lstStyle/>
           <a:p>
             <a:pPr algn="l" indent="0" marL="0">
@@ -25708,49 +25553,7 @@
       </p:sp>
       <p:sp>
         <p:nvSpPr>
-          <p:cNvPr id="8" name="Text 6"/>
-          <p:cNvSpPr txBox="1"/>
-          <p:nvPr/>
-        </p:nvSpPr>
-        <p:spPr>
-          <a:xfrm>
-            <a:off x="3840480" y="1417320"/>
-            <a:ext cx="6766560" cy="594360"/>
-          </a:xfrm>
-          <a:prstGeom prst="rect">
-            <a:avLst/>
-          </a:prstGeom>
-          <a:noFill/>
-          <a:ln/>
-        </p:spPr>
-        <p:txBody>
-          <a:bodyPr wrap="square" lIns="76200" tIns="76200" rIns="76200" bIns="76200" rtlCol="0" anchor="t"/>
-          <a:lstStyle/>
-          <a:p>
-            <a:pPr algn="l" indent="0" marL="0">
-              <a:lnSpc>
-                <a:spcPts val="3600"/>
-              </a:lnSpc>
-              <a:buNone/>
-            </a:pPr>
-            <a:r>
-              <a:rPr lang="en-US" sz="2800" b="1" dirty="0">
-                <a:solidFill>
-                  <a:srgbClr val="962B7C"/>
-                </a:solidFill>
-                <a:latin typeface="Alexandria" pitchFamily="34" charset="0"/>
-                <a:ea typeface="Alexandria" pitchFamily="34" charset="-122"/>
-                <a:cs typeface="Alexandria" pitchFamily="34" charset="-120"/>
-              </a:rPr>
-              <a:t>78–93 phút</a:t>
-            </a:r>
-            <a:endParaRPr lang="en-US" sz="2800" dirty="0"/>
-          </a:p>
-        </p:txBody>
-      </p:sp>
-      <p:sp>
-        <p:nvSpPr>
-          <p:cNvPr id="9" name="Text 0"/>
+          <p:cNvPr id="8" name="Text 0"/>
           <p:cNvSpPr/>
           <p:nvPr>
             <p:ph idx="100" type="title" hasCustomPrompt="1"/>
@@ -25758,8 +25561,8 @@
         </p:nvSpPr>
         <p:spPr>
           <a:xfrm>
-            <a:off x="3840480" y="2103120"/>
-            <a:ext cx="6766560" cy="2194560"/>
+            <a:off x="3840480" y="2240280"/>
+            <a:ext cx="6766560" cy="2377440"/>
           </a:xfrm>
           <a:prstGeom prst="rect">
             <a:avLst/>
@@ -25768,7 +25571,7 @@
           <a:ln/>
         </p:spPr>
         <p:txBody>
-          <a:bodyPr wrap="square" lIns="76200" tIns="76200" rIns="76200" bIns="76200" rtlCol="0" anchor="t"/>
+          <a:bodyPr wrap="square" lIns="76200" tIns="76200" rIns="76200" bIns="76200" rtlCol="0" anchor="ctr"/>
           <a:lstStyle/>
           <a:p>
             <a:pPr algn="l" indent="0" marL="0">
@@ -33611,49 +33414,7 @@
       </p:sp>
       <p:sp>
         <p:nvSpPr>
-          <p:cNvPr id="8" name="Text 6"/>
-          <p:cNvSpPr txBox="1"/>
-          <p:nvPr/>
-        </p:nvSpPr>
-        <p:spPr>
-          <a:xfrm>
-            <a:off x="3840480" y="1417320"/>
-            <a:ext cx="6766560" cy="594360"/>
-          </a:xfrm>
-          <a:prstGeom prst="rect">
-            <a:avLst/>
-          </a:prstGeom>
-          <a:noFill/>
-          <a:ln/>
-        </p:spPr>
-        <p:txBody>
-          <a:bodyPr wrap="square" lIns="76200" tIns="76200" rIns="76200" bIns="76200" rtlCol="0" anchor="t"/>
-          <a:lstStyle/>
-          <a:p>
-            <a:pPr algn="l" indent="0" marL="0">
-              <a:lnSpc>
-                <a:spcPts val="3600"/>
-              </a:lnSpc>
-              <a:buNone/>
-            </a:pPr>
-            <a:r>
-              <a:rPr lang="en-US" sz="2800" b="1" dirty="0">
-                <a:solidFill>
-                  <a:srgbClr val="962B7C"/>
-                </a:solidFill>
-                <a:latin typeface="Alexandria" pitchFamily="34" charset="0"/>
-                <a:ea typeface="Alexandria" pitchFamily="34" charset="-122"/>
-                <a:cs typeface="Alexandria" pitchFamily="34" charset="-120"/>
-              </a:rPr>
-              <a:t>98–143 phút</a:t>
-            </a:r>
-            <a:endParaRPr lang="en-US" sz="2800" dirty="0"/>
-          </a:p>
-        </p:txBody>
-      </p:sp>
-      <p:sp>
-        <p:nvSpPr>
-          <p:cNvPr id="9" name="Text 0"/>
+          <p:cNvPr id="8" name="Text 0"/>
           <p:cNvSpPr/>
           <p:nvPr>
             <p:ph idx="100" type="title" hasCustomPrompt="1"/>
@@ -33661,8 +33422,8 @@
         </p:nvSpPr>
         <p:spPr>
           <a:xfrm>
-            <a:off x="3840480" y="2103120"/>
-            <a:ext cx="6766560" cy="2194560"/>
+            <a:off x="3840480" y="2240280"/>
+            <a:ext cx="6766560" cy="2377440"/>
           </a:xfrm>
           <a:prstGeom prst="rect">
             <a:avLst/>
@@ -33671,7 +33432,7 @@
           <a:ln/>
         </p:spPr>
         <p:txBody>
-          <a:bodyPr wrap="square" lIns="76200" tIns="76200" rIns="76200" bIns="76200" rtlCol="0" anchor="t"/>
+          <a:bodyPr wrap="square" lIns="76200" tIns="76200" rIns="76200" bIns="76200" rtlCol="0" anchor="ctr"/>
           <a:lstStyle/>
           <a:p>
             <a:pPr algn="l" indent="0" marL="0">
@@ -33860,7 +33621,7 @@
                 <a:ea typeface="Alexandria" pitchFamily="34" charset="-122"/>
                 <a:cs typeface="Alexandria" pitchFamily="34" charset="-120"/>
               </a:rPr>
-              <a:t>Xưởng bảng hỏi (45'): ra về với một bản nháp đầy đủ</a:t>
+              <a:t>Xưởng bảng hỏi: ra về với một bản nháp đầy đủ</a:t>
             </a:r>
             <a:endParaRPr lang="en-US" sz="3400" dirty="0"/>
           </a:p>
@@ -33897,7 +33658,7 @@
         <p:spPr>
           <a:xfrm>
             <a:off x="640080" y="1828800"/>
-            <a:ext cx="1280160" cy="548640"/>
+            <a:ext cx="731520" cy="548640"/>
           </a:xfrm>
           <a:prstGeom prst="roundRect">
             <a:avLst>
@@ -33919,7 +33680,7 @@
         <p:spPr>
           <a:xfrm>
             <a:off x="640080" y="1828800"/>
-            <a:ext cx="1280160" cy="548640"/>
+            <a:ext cx="731520" cy="548640"/>
           </a:xfrm>
           <a:prstGeom prst="rect">
             <a:avLst/>
@@ -33946,7 +33707,7 @@
                 <a:ea typeface="Alexandria" pitchFamily="34" charset="-122"/>
                 <a:cs typeface="Alexandria" pitchFamily="34" charset="-120"/>
               </a:rPr>
-              <a:t>8'</a:t>
+              <a:t>1</a:t>
             </a:r>
             <a:endParaRPr lang="en-US" sz="2400" dirty="0"/>
           </a:p>
@@ -33960,8 +33721,8 @@
         </p:nvSpPr>
         <p:spPr>
           <a:xfrm>
-            <a:off x="2103120" y="1783080"/>
-            <a:ext cx="9372600" cy="640080"/>
+            <a:off x="1554480" y="1783080"/>
+            <a:ext cx="9921240" cy="640080"/>
           </a:xfrm>
           <a:prstGeom prst="rect">
             <a:avLst/>
@@ -34025,7 +33786,7 @@
         <p:spPr>
           <a:xfrm>
             <a:off x="640080" y="2606040"/>
-            <a:ext cx="1280160" cy="548640"/>
+            <a:ext cx="731520" cy="548640"/>
           </a:xfrm>
           <a:prstGeom prst="roundRect">
             <a:avLst>
@@ -34047,7 +33808,7 @@
         <p:spPr>
           <a:xfrm>
             <a:off x="640080" y="2606040"/>
-            <a:ext cx="1280160" cy="548640"/>
+            <a:ext cx="731520" cy="548640"/>
           </a:xfrm>
           <a:prstGeom prst="rect">
             <a:avLst/>
@@ -34074,7 +33835,7 @@
                 <a:ea typeface="Alexandria" pitchFamily="34" charset="-122"/>
                 <a:cs typeface="Alexandria" pitchFamily="34" charset="-120"/>
               </a:rPr>
-              <a:t>22'</a:t>
+              <a:t>2</a:t>
             </a:r>
             <a:endParaRPr lang="en-US" sz="2400" dirty="0"/>
           </a:p>
@@ -34088,8 +33849,8 @@
         </p:nvSpPr>
         <p:spPr>
           <a:xfrm>
-            <a:off x="2103120" y="2560320"/>
-            <a:ext cx="9372600" cy="640080"/>
+            <a:off x="1554480" y="2560320"/>
+            <a:ext cx="9921240" cy="640080"/>
           </a:xfrm>
           <a:prstGeom prst="rect">
             <a:avLst/>
@@ -34153,7 +33914,7 @@
         <p:spPr>
           <a:xfrm>
             <a:off x="640080" y="3383280"/>
-            <a:ext cx="1280160" cy="548640"/>
+            <a:ext cx="731520" cy="548640"/>
           </a:xfrm>
           <a:prstGeom prst="roundRect">
             <a:avLst>
@@ -34175,7 +33936,7 @@
         <p:spPr>
           <a:xfrm>
             <a:off x="640080" y="3383280"/>
-            <a:ext cx="1280160" cy="548640"/>
+            <a:ext cx="731520" cy="548640"/>
           </a:xfrm>
           <a:prstGeom prst="rect">
             <a:avLst/>
@@ -34202,7 +33963,7 @@
                 <a:ea typeface="Alexandria" pitchFamily="34" charset="-122"/>
                 <a:cs typeface="Alexandria" pitchFamily="34" charset="-120"/>
               </a:rPr>
-              <a:t>10'</a:t>
+              <a:t>3</a:t>
             </a:r>
             <a:endParaRPr lang="en-US" sz="2400" dirty="0"/>
           </a:p>
@@ -34216,8 +33977,8 @@
         </p:nvSpPr>
         <p:spPr>
           <a:xfrm>
-            <a:off x="2103120" y="3337560"/>
-            <a:ext cx="9372600" cy="640080"/>
+            <a:off x="1554480" y="3337560"/>
+            <a:ext cx="9921240" cy="640080"/>
           </a:xfrm>
           <a:prstGeom prst="rect">
             <a:avLst/>
@@ -34281,7 +34042,7 @@
         <p:spPr>
           <a:xfrm>
             <a:off x="640080" y="4160520"/>
-            <a:ext cx="1280160" cy="548640"/>
+            <a:ext cx="731520" cy="548640"/>
           </a:xfrm>
           <a:prstGeom prst="roundRect">
             <a:avLst>
@@ -34303,7 +34064,7 @@
         <p:spPr>
           <a:xfrm>
             <a:off x="640080" y="4160520"/>
-            <a:ext cx="1280160" cy="548640"/>
+            <a:ext cx="731520" cy="548640"/>
           </a:xfrm>
           <a:prstGeom prst="rect">
             <a:avLst/>
@@ -34330,7 +34091,7 @@
                 <a:ea typeface="Alexandria" pitchFamily="34" charset="-122"/>
                 <a:cs typeface="Alexandria" pitchFamily="34" charset="-120"/>
               </a:rPr>
-              <a:t>5'</a:t>
+              <a:t>4</a:t>
             </a:r>
             <a:endParaRPr lang="en-US" sz="2400" dirty="0"/>
           </a:p>
@@ -34344,8 +34105,8 @@
         </p:nvSpPr>
         <p:spPr>
           <a:xfrm>
-            <a:off x="2103120" y="4114800"/>
-            <a:ext cx="9372600" cy="640080"/>
+            <a:off x="1554480" y="4114800"/>
+            <a:ext cx="9921240" cy="640080"/>
           </a:xfrm>
           <a:prstGeom prst="rect">
             <a:avLst/>
@@ -34686,7 +34447,7 @@
                 <a:ea typeface="Alexandria" pitchFamily="34" charset="-122"/>
                 <a:cs typeface="Alexandria" pitchFamily="34" charset="-120"/>
               </a:rPr>
-              <a:t>Săn lỗi chéo (10'): đọc bảng hỏi của nhóm bạn bằng con mắt người trả lời</a:t>
+              <a:t>Săn lỗi chéo: đọc bảng hỏi của nhóm bạn bằng con mắt người trả lời</a:t>
             </a:r>
             <a:endParaRPr lang="en-US" sz="3400" dirty="0"/>
           </a:p>
@@ -35896,49 +35657,7 @@
       </p:sp>
       <p:sp>
         <p:nvSpPr>
-          <p:cNvPr id="8" name="Text 6"/>
-          <p:cNvSpPr txBox="1"/>
-          <p:nvPr/>
-        </p:nvSpPr>
-        <p:spPr>
-          <a:xfrm>
-            <a:off x="3840480" y="1417320"/>
-            <a:ext cx="6766560" cy="594360"/>
-          </a:xfrm>
-          <a:prstGeom prst="rect">
-            <a:avLst/>
-          </a:prstGeom>
-          <a:noFill/>
-          <a:ln/>
-        </p:spPr>
-        <p:txBody>
-          <a:bodyPr wrap="square" lIns="76200" tIns="76200" rIns="76200" bIns="76200" rtlCol="0" anchor="t"/>
-          <a:lstStyle/>
-          <a:p>
-            <a:pPr algn="l" indent="0" marL="0">
-              <a:lnSpc>
-                <a:spcPts val="3600"/>
-              </a:lnSpc>
-              <a:buNone/>
-            </a:pPr>
-            <a:r>
-              <a:rPr lang="en-US" sz="2800" b="1" dirty="0">
-                <a:solidFill>
-                  <a:srgbClr val="962B7C"/>
-                </a:solidFill>
-                <a:latin typeface="Alexandria" pitchFamily="34" charset="0"/>
-                <a:ea typeface="Alexandria" pitchFamily="34" charset="-122"/>
-                <a:cs typeface="Alexandria" pitchFamily="34" charset="-120"/>
-              </a:rPr>
-              <a:t>143–148 phút</a:t>
-            </a:r>
-            <a:endParaRPr lang="en-US" sz="2800" dirty="0"/>
-          </a:p>
-        </p:txBody>
-      </p:sp>
-      <p:sp>
-        <p:nvSpPr>
-          <p:cNvPr id="9" name="Text 0"/>
+          <p:cNvPr id="8" name="Text 0"/>
           <p:cNvSpPr/>
           <p:nvPr>
             <p:ph idx="100" type="title" hasCustomPrompt="1"/>
@@ -35946,8 +35665,8 @@
         </p:nvSpPr>
         <p:spPr>
           <a:xfrm>
-            <a:off x="3840480" y="2103120"/>
-            <a:ext cx="6766560" cy="2194560"/>
+            <a:off x="3840480" y="2240280"/>
+            <a:ext cx="6766560" cy="2377440"/>
           </a:xfrm>
           <a:prstGeom prst="rect">
             <a:avLst/>
@@ -35956,7 +35675,7 @@
           <a:ln/>
         </p:spPr>
         <p:txBody>
-          <a:bodyPr wrap="square" lIns="76200" tIns="76200" rIns="76200" bIns="76200" rtlCol="0" anchor="t"/>
+          <a:bodyPr wrap="square" lIns="76200" tIns="76200" rIns="76200" bIns="76200" rtlCol="0" anchor="ctr"/>
           <a:lstStyle/>
           <a:p>
             <a:pPr algn="l" indent="0" marL="0">
@@ -37493,49 +37212,7 @@
       </p:sp>
       <p:sp>
         <p:nvSpPr>
-          <p:cNvPr id="8" name="Text 6"/>
-          <p:cNvSpPr txBox="1"/>
-          <p:nvPr/>
-        </p:nvSpPr>
-        <p:spPr>
-          <a:xfrm>
-            <a:off x="3840480" y="1417320"/>
-            <a:ext cx="6766560" cy="594360"/>
-          </a:xfrm>
-          <a:prstGeom prst="rect">
-            <a:avLst/>
-          </a:prstGeom>
-          <a:noFill/>
-          <a:ln/>
-        </p:spPr>
-        <p:txBody>
-          <a:bodyPr wrap="square" lIns="76200" tIns="76200" rIns="76200" bIns="76200" rtlCol="0" anchor="t"/>
-          <a:lstStyle/>
-          <a:p>
-            <a:pPr algn="l" indent="0" marL="0">
-              <a:lnSpc>
-                <a:spcPts val="3600"/>
-              </a:lnSpc>
-              <a:buNone/>
-            </a:pPr>
-            <a:r>
-              <a:rPr lang="en-US" sz="2800" b="1" dirty="0">
-                <a:solidFill>
-                  <a:srgbClr val="962B7C"/>
-                </a:solidFill>
-                <a:latin typeface="Alexandria" pitchFamily="34" charset="0"/>
-                <a:ea typeface="Alexandria" pitchFamily="34" charset="-122"/>
-                <a:cs typeface="Alexandria" pitchFamily="34" charset="-120"/>
-              </a:rPr>
-              <a:t>10–22 phút</a:t>
-            </a:r>
-            <a:endParaRPr lang="en-US" sz="2800" dirty="0"/>
-          </a:p>
-        </p:txBody>
-      </p:sp>
-      <p:sp>
-        <p:nvSpPr>
-          <p:cNvPr id="9" name="Text 0"/>
+          <p:cNvPr id="8" name="Text 0"/>
           <p:cNvSpPr/>
           <p:nvPr>
             <p:ph idx="100" type="title" hasCustomPrompt="1"/>
@@ -37543,8 +37220,8 @@
         </p:nvSpPr>
         <p:spPr>
           <a:xfrm>
-            <a:off x="3840480" y="2103120"/>
-            <a:ext cx="6766560" cy="2194560"/>
+            <a:off x="3840480" y="2240280"/>
+            <a:ext cx="6766560" cy="2377440"/>
           </a:xfrm>
           <a:prstGeom prst="rect">
             <a:avLst/>
@@ -37553,7 +37230,7 @@
           <a:ln/>
         </p:spPr>
         <p:txBody>
-          <a:bodyPr wrap="square" lIns="76200" tIns="76200" rIns="76200" bIns="76200" rtlCol="0" anchor="t"/>
+          <a:bodyPr wrap="square" lIns="76200" tIns="76200" rIns="76200" bIns="76200" rtlCol="0" anchor="ctr"/>
           <a:lstStyle/>
           <a:p>
             <a:pPr algn="l" indent="0" marL="0">
